--- a/Agentic_Intake_System_Architecture.pptx
+++ b/Agentic_Intake_System_Architecture.pptx
@@ -3104,8 +3104,8 @@
         </p:nvSpPr>
         <p:spPr>
           <a:xfrm>
-            <a:off x="228600" y="91440"/>
-            <a:ext cx="7315200" cy="411480"/>
+            <a:off x="274320" y="73152"/>
+            <a:ext cx="7315200" cy="384048"/>
           </a:xfrm>
           <a:prstGeom prst="rect">
             <a:avLst/>
@@ -3133,7 +3133,7 @@
               </a:defRPr>
             </a:pPr>
             <a:r>
-              <a:t>Agentic Intake System — MVP1 Flow</a:t>
+              <a:t>Agentic Intake System — Architecture</a:t>
             </a:r>
           </a:p>
         </p:txBody>
@@ -3146,7 +3146,7 @@
         </p:nvSpPr>
         <p:spPr>
           <a:xfrm>
-            <a:off x="228600" y="411480"/>
+            <a:off x="274320" y="384048"/>
             <a:ext cx="7315200" cy="228600"/>
           </a:xfrm>
           <a:prstGeom prst="rect">
@@ -3175,7 +3175,7 @@
               </a:defRPr>
             </a:pPr>
             <a:r>
-              <a:t>Conversational intake with validation, assistance, and platform submission</a:t>
+              <a:t>MVP1: Conversational intake with validation, assistance, and platform submission</a:t>
             </a:r>
           </a:p>
         </p:txBody>
@@ -3188,8 +3188,8 @@
         </p:nvSpPr>
         <p:spPr>
           <a:xfrm>
-            <a:off x="91440" y="868680"/>
-            <a:ext cx="2194560" cy="2560320"/>
+            <a:off x="91440" y="777240"/>
+            <a:ext cx="2011680" cy="2148840"/>
           </a:xfrm>
           <a:prstGeom prst="roundRect">
             <a:avLst/>
@@ -3227,223 +3227,14 @@
       </p:sp>
       <p:sp>
         <p:nvSpPr>
-          <p:cNvPr id="5" name="Oval 4"/>
-          <p:cNvSpPr/>
-          <p:nvPr/>
-        </p:nvSpPr>
-        <p:spPr>
-          <a:xfrm>
-            <a:off x="182880" y="941832"/>
-            <a:ext cx="292608" cy="292608"/>
-          </a:xfrm>
-          <a:prstGeom prst="ellipse">
-            <a:avLst/>
-          </a:prstGeom>
-          <a:solidFill>
-            <a:srgbClr val="1B2A4A"/>
-          </a:solidFill>
-          <a:ln>
-            <a:noFill/>
-          </a:ln>
-        </p:spPr>
-        <p:style>
-          <a:lnRef idx="1">
-            <a:schemeClr val="accent1"/>
-          </a:lnRef>
-          <a:fillRef idx="3">
-            <a:schemeClr val="accent1"/>
-          </a:fillRef>
-          <a:effectRef idx="2">
-            <a:schemeClr val="accent1"/>
-          </a:effectRef>
-          <a:fontRef idx="minor">
-            <a:schemeClr val="lt1"/>
-          </a:fontRef>
-        </p:style>
-        <p:txBody>
-          <a:bodyPr rtlCol="0" anchor="ctr" wrap="none"/>
-          <a:lstStyle/>
-          <a:p>
-            <a:pPr algn="ctr">
-              <a:defRPr sz="1000">
-                <a:solidFill>
-                  <a:srgbClr val="FFFFFF"/>
-                </a:solidFill>
-              </a:defRPr>
-            </a:pPr>
-            <a:r>
-              <a:t>👤</a:t>
-            </a:r>
-          </a:p>
-        </p:txBody>
-      </p:sp>
-      <p:sp>
-        <p:nvSpPr>
-          <p:cNvPr id="6" name="Oval 5"/>
-          <p:cNvSpPr/>
-          <p:nvPr/>
-        </p:nvSpPr>
-        <p:spPr>
-          <a:xfrm>
-            <a:off x="548640" y="941832"/>
-            <a:ext cx="292608" cy="292608"/>
-          </a:xfrm>
-          <a:prstGeom prst="ellipse">
-            <a:avLst/>
-          </a:prstGeom>
-          <a:solidFill>
-            <a:srgbClr val="1B2A4A"/>
-          </a:solidFill>
-          <a:ln>
-            <a:noFill/>
-          </a:ln>
-        </p:spPr>
-        <p:style>
-          <a:lnRef idx="1">
-            <a:schemeClr val="accent1"/>
-          </a:lnRef>
-          <a:fillRef idx="3">
-            <a:schemeClr val="accent1"/>
-          </a:fillRef>
-          <a:effectRef idx="2">
-            <a:schemeClr val="accent1"/>
-          </a:effectRef>
-          <a:fontRef idx="minor">
-            <a:schemeClr val="lt1"/>
-          </a:fontRef>
-        </p:style>
-        <p:txBody>
-          <a:bodyPr rtlCol="0" anchor="ctr" wrap="none"/>
-          <a:lstStyle/>
-          <a:p>
-            <a:pPr algn="ctr">
-              <a:defRPr sz="1000">
-                <a:solidFill>
-                  <a:srgbClr val="FFFFFF"/>
-                </a:solidFill>
-              </a:defRPr>
-            </a:pPr>
-            <a:r>
-              <a:t>💬</a:t>
-            </a:r>
-          </a:p>
-        </p:txBody>
-      </p:sp>
-      <p:sp>
-        <p:nvSpPr>
-          <p:cNvPr id="7" name="Oval 6"/>
-          <p:cNvSpPr/>
-          <p:nvPr/>
-        </p:nvSpPr>
-        <p:spPr>
-          <a:xfrm>
-            <a:off x="914400" y="941832"/>
-            <a:ext cx="292608" cy="292608"/>
-          </a:xfrm>
-          <a:prstGeom prst="ellipse">
-            <a:avLst/>
-          </a:prstGeom>
-          <a:solidFill>
-            <a:srgbClr val="1B2A4A"/>
-          </a:solidFill>
-          <a:ln>
-            <a:noFill/>
-          </a:ln>
-        </p:spPr>
-        <p:style>
-          <a:lnRef idx="1">
-            <a:schemeClr val="accent1"/>
-          </a:lnRef>
-          <a:fillRef idx="3">
-            <a:schemeClr val="accent1"/>
-          </a:fillRef>
-          <a:effectRef idx="2">
-            <a:schemeClr val="accent1"/>
-          </a:effectRef>
-          <a:fontRef idx="minor">
-            <a:schemeClr val="lt1"/>
-          </a:fontRef>
-        </p:style>
-        <p:txBody>
-          <a:bodyPr rtlCol="0" anchor="ctr" wrap="none"/>
-          <a:lstStyle/>
-          <a:p>
-            <a:pPr algn="ctr">
-              <a:defRPr sz="1000">
-                <a:solidFill>
-                  <a:srgbClr val="FFFFFF"/>
-                </a:solidFill>
-              </a:defRPr>
-            </a:pPr>
-            <a:r>
-              <a:t>⚙</a:t>
-            </a:r>
-          </a:p>
-        </p:txBody>
-      </p:sp>
-      <p:sp>
-        <p:nvSpPr>
-          <p:cNvPr id="8" name="Oval 7"/>
-          <p:cNvSpPr/>
-          <p:nvPr/>
-        </p:nvSpPr>
-        <p:spPr>
-          <a:xfrm>
-            <a:off x="1371600" y="941832"/>
-            <a:ext cx="292608" cy="292608"/>
-          </a:xfrm>
-          <a:prstGeom prst="ellipse">
-            <a:avLst/>
-          </a:prstGeom>
-          <a:solidFill>
-            <a:srgbClr val="1B2A4A"/>
-          </a:solidFill>
-          <a:ln>
-            <a:noFill/>
-          </a:ln>
-        </p:spPr>
-        <p:style>
-          <a:lnRef idx="1">
-            <a:schemeClr val="accent1"/>
-          </a:lnRef>
-          <a:fillRef idx="3">
-            <a:schemeClr val="accent1"/>
-          </a:fillRef>
-          <a:effectRef idx="2">
-            <a:schemeClr val="accent1"/>
-          </a:effectRef>
-          <a:fontRef idx="minor">
-            <a:schemeClr val="lt1"/>
-          </a:fontRef>
-        </p:style>
-        <p:txBody>
-          <a:bodyPr rtlCol="0" anchor="ctr" wrap="none"/>
-          <a:lstStyle/>
-          <a:p>
-            <a:pPr algn="ctr">
-              <a:defRPr sz="1300" b="1">
-                <a:solidFill>
-                  <a:srgbClr val="FFFFFF"/>
-                </a:solidFill>
-                <a:latin typeface="Segoe UI"/>
-              </a:defRPr>
-            </a:pPr>
-            <a:r>
-              <a:t>1</a:t>
-            </a:r>
-          </a:p>
-        </p:txBody>
-      </p:sp>
-      <p:sp>
-        <p:nvSpPr>
-          <p:cNvPr id="9" name="TextBox 8"/>
+          <p:cNvPr id="5" name="TextBox 4"/>
           <p:cNvSpPr txBox="1"/>
           <p:nvPr/>
         </p:nvSpPr>
         <p:spPr>
           <a:xfrm>
-            <a:off x="137160" y="1280160"/>
-            <a:ext cx="2103120" cy="274320"/>
+            <a:off x="182880" y="868680"/>
+            <a:ext cx="1828800" cy="274320"/>
           </a:xfrm>
           <a:prstGeom prst="rect">
             <a:avLst/>
@@ -3478,14 +3269,14 @@
       </p:sp>
       <p:sp>
         <p:nvSpPr>
-          <p:cNvPr id="10" name="Rounded Rectangle 9"/>
+          <p:cNvPr id="6" name="Rounded Rectangle 5"/>
           <p:cNvSpPr/>
           <p:nvPr/>
         </p:nvSpPr>
         <p:spPr>
           <a:xfrm>
-            <a:off x="182880" y="1600200"/>
-            <a:ext cx="2011680" cy="457200"/>
+            <a:off x="182880" y="1234440"/>
+            <a:ext cx="1828800" cy="411480"/>
           </a:xfrm>
           <a:prstGeom prst="roundRect">
             <a:avLst/>
@@ -3518,7 +3309,7 @@
           <a:lstStyle/>
           <a:p>
             <a:pPr algn="ctr">
-              <a:defRPr sz="900" b="1">
+              <a:defRPr sz="800" b="1">
                 <a:solidFill>
                   <a:srgbClr val="FFFFFF"/>
                 </a:solidFill>
@@ -3526,78 +3317,25 @@
               </a:defRPr>
             </a:pPr>
             <a:r>
-              <a:t>react spa</a:t>
+              <a:t>React Frontend</a:t>
             </a:r>
             <a:br/>
             <a:r>
-              <a:t>chat ui + intake catalog</a:t>
-            </a:r>
-          </a:p>
-        </p:txBody>
-      </p:sp>
-      <p:sp>
-        <p:nvSpPr>
-          <p:cNvPr id="11" name="Oval 10"/>
+              <a:t>Chat UI + Intake Catalog</a:t>
+            </a:r>
+          </a:p>
+        </p:txBody>
+      </p:sp>
+      <p:sp>
+        <p:nvSpPr>
+          <p:cNvPr id="7" name="Rounded Rectangle 6"/>
           <p:cNvSpPr/>
           <p:nvPr/>
         </p:nvSpPr>
         <p:spPr>
           <a:xfrm>
-            <a:off x="1783080" y="1920240"/>
-            <a:ext cx="256032" cy="256032"/>
-          </a:xfrm>
-          <a:prstGeom prst="ellipse">
-            <a:avLst/>
-          </a:prstGeom>
-          <a:solidFill>
-            <a:srgbClr val="1B2A4A"/>
-          </a:solidFill>
-          <a:ln>
-            <a:noFill/>
-          </a:ln>
-        </p:spPr>
-        <p:style>
-          <a:lnRef idx="1">
-            <a:schemeClr val="accent1"/>
-          </a:lnRef>
-          <a:fillRef idx="3">
-            <a:schemeClr val="accent1"/>
-          </a:fillRef>
-          <a:effectRef idx="2">
-            <a:schemeClr val="accent1"/>
-          </a:effectRef>
-          <a:fontRef idx="minor">
-            <a:schemeClr val="lt1"/>
-          </a:fontRef>
-        </p:style>
-        <p:txBody>
-          <a:bodyPr rtlCol="0" anchor="ctr" wrap="none"/>
-          <a:lstStyle/>
-          <a:p>
-            <a:pPr algn="ctr">
-              <a:defRPr sz="1300" b="1">
-                <a:solidFill>
-                  <a:srgbClr val="FFFFFF"/>
-                </a:solidFill>
-                <a:latin typeface="Segoe UI"/>
-              </a:defRPr>
-            </a:pPr>
-            <a:r>
-              <a:t>2</a:t>
-            </a:r>
-          </a:p>
-        </p:txBody>
-      </p:sp>
-      <p:sp>
-        <p:nvSpPr>
-          <p:cNvPr id="12" name="Rounded Rectangle 11"/>
-          <p:cNvSpPr/>
-          <p:nvPr/>
-        </p:nvSpPr>
-        <p:spPr>
-          <a:xfrm>
-            <a:off x="182880" y="2148840"/>
-            <a:ext cx="2011680" cy="320040"/>
+            <a:off x="182880" y="1737360"/>
+            <a:ext cx="1828800" cy="274320"/>
           </a:xfrm>
           <a:prstGeom prst="roundRect">
             <a:avLst/>
@@ -3645,14 +3383,14 @@
       </p:sp>
       <p:sp>
         <p:nvSpPr>
-          <p:cNvPr id="13" name="Right Arrow 12"/>
+          <p:cNvPr id="8" name="Right Arrow 7"/>
           <p:cNvSpPr/>
           <p:nvPr/>
         </p:nvSpPr>
         <p:spPr>
           <a:xfrm>
-            <a:off x="2103120" y="1691640"/>
-            <a:ext cx="365760" cy="164592"/>
+            <a:off x="1965960" y="1325880"/>
+            <a:ext cx="320040" cy="137160"/>
           </a:xfrm>
           <a:prstGeom prst="rightArrow">
             <a:avLst/>
@@ -3688,14 +3426,14 @@
       </p:sp>
       <p:sp>
         <p:nvSpPr>
-          <p:cNvPr id="14" name="Right Arrow 13"/>
+          <p:cNvPr id="9" name="Right Arrow 8"/>
           <p:cNvSpPr/>
           <p:nvPr/>
         </p:nvSpPr>
         <p:spPr>
           <a:xfrm rot="10800000">
-            <a:off x="2103120" y="2240280"/>
-            <a:ext cx="365760" cy="137160"/>
+            <a:off x="1965960" y="1783080"/>
+            <a:ext cx="320040" cy="109728"/>
           </a:xfrm>
           <a:prstGeom prst="rightArrow">
             <a:avLst/>
@@ -3731,14 +3469,14 @@
       </p:sp>
       <p:sp>
         <p:nvSpPr>
-          <p:cNvPr id="15" name="TextBox 14"/>
+          <p:cNvPr id="10" name="TextBox 9"/>
           <p:cNvSpPr txBox="1"/>
           <p:nvPr/>
         </p:nvSpPr>
         <p:spPr>
           <a:xfrm>
-            <a:off x="182880" y="2560320"/>
-            <a:ext cx="2011680" cy="731520"/>
+            <a:off x="182880" y="2103120"/>
+            <a:ext cx="1828800" cy="731520"/>
           </a:xfrm>
           <a:prstGeom prst="rect">
             <a:avLst/>
@@ -3758,7 +3496,7 @@
               <a:spcAft>
                 <a:spcPts val="0"/>
               </a:spcAft>
-              <a:defRPr sz="700" b="1">
+              <a:defRPr sz="700" b="0">
                 <a:solidFill>
                   <a:srgbClr val="404A58"/>
                 </a:solidFill>
@@ -3766,7 +3504,7 @@
               </a:defRPr>
             </a:pPr>
             <a:r>
-              <a:t>SSE streams responses back:</a:t>
+              <a:t>User selects an intake from</a:t>
             </a:r>
           </a:p>
           <a:p>
@@ -3785,7 +3523,7 @@
               </a:defRPr>
             </a:pPr>
             <a:r>
-              <a:t>• Agent messages in real-time</a:t>
+              <a:t>the catalog. Responses stream</a:t>
             </a:r>
           </a:p>
           <a:p>
@@ -3804,7 +3542,7 @@
               </a:defRPr>
             </a:pPr>
             <a:r>
-              <a:t>• Progress updates</a:t>
+              <a:t>back via SSE with progress</a:t>
             </a:r>
           </a:p>
           <a:p>
@@ -3823,27 +3561,208 @@
               </a:defRPr>
             </a:pPr>
             <a:r>
-              <a:t>• Ticket ID + confirmation</a:t>
-            </a:r>
-          </a:p>
-        </p:txBody>
-      </p:sp>
-      <p:sp>
-        <p:nvSpPr>
-          <p:cNvPr id="16" name="Rounded Rectangle 15"/>
+              <a:t>updates and ticket confirmation.</a:t>
+            </a:r>
+          </a:p>
+        </p:txBody>
+      </p:sp>
+      <p:sp>
+        <p:nvSpPr>
+          <p:cNvPr id="11" name="Rounded Rectangle 10"/>
           <p:cNvSpPr/>
           <p:nvPr/>
         </p:nvSpPr>
         <p:spPr>
           <a:xfrm>
-            <a:off x="137160" y="3383280"/>
-            <a:ext cx="2103120" cy="365760"/>
+            <a:off x="2331720" y="777240"/>
+            <a:ext cx="7269480" cy="3566160"/>
           </a:xfrm>
           <a:prstGeom prst="roundRect">
             <a:avLst/>
           </a:prstGeom>
           <a:solidFill>
-            <a:srgbClr val="F0F2F5"/>
+            <a:srgbClr val="EBEEF3"/>
+          </a:solidFill>
+          <a:ln w="19050">
+            <a:solidFill>
+              <a:srgbClr val="B0B8C5"/>
+            </a:solidFill>
+          </a:ln>
+        </p:spPr>
+        <p:style>
+          <a:lnRef idx="1">
+            <a:schemeClr val="accent1"/>
+          </a:lnRef>
+          <a:fillRef idx="3">
+            <a:schemeClr val="accent1"/>
+          </a:fillRef>
+          <a:effectRef idx="2">
+            <a:schemeClr val="accent1"/>
+          </a:effectRef>
+          <a:fontRef idx="minor">
+            <a:schemeClr val="lt1"/>
+          </a:fontRef>
+        </p:style>
+        <p:txBody>
+          <a:bodyPr rtlCol="0" anchor="ctr"/>
+          <a:lstStyle/>
+          <a:p>
+            <a:pPr algn="ctr"/>
+          </a:p>
+        </p:txBody>
+      </p:sp>
+      <p:sp>
+        <p:nvSpPr>
+          <p:cNvPr id="12" name="Oval 11"/>
+          <p:cNvSpPr/>
+          <p:nvPr/>
+        </p:nvSpPr>
+        <p:spPr>
+          <a:xfrm>
+            <a:off x="5623560" y="640080"/>
+            <a:ext cx="274320" cy="274320"/>
+          </a:xfrm>
+          <a:prstGeom prst="ellipse">
+            <a:avLst/>
+          </a:prstGeom>
+          <a:solidFill>
+            <a:srgbClr val="009688"/>
+          </a:solidFill>
+          <a:ln>
+            <a:noFill/>
+          </a:ln>
+        </p:spPr>
+        <p:style>
+          <a:lnRef idx="1">
+            <a:schemeClr val="accent1"/>
+          </a:lnRef>
+          <a:fillRef idx="3">
+            <a:schemeClr val="accent1"/>
+          </a:fillRef>
+          <a:effectRef idx="2">
+            <a:schemeClr val="accent1"/>
+          </a:effectRef>
+          <a:fontRef idx="minor">
+            <a:schemeClr val="lt1"/>
+          </a:fontRef>
+        </p:style>
+        <p:txBody>
+          <a:bodyPr rtlCol="0" anchor="ctr"/>
+          <a:lstStyle/>
+          <a:p>
+            <a:pPr algn="ctr">
+              <a:defRPr sz="1000" b="1">
+                <a:solidFill>
+                  <a:srgbClr val="FFFFFF"/>
+                </a:solidFill>
+              </a:defRPr>
+            </a:pPr>
+            <a:r>
+              <a:t>F</a:t>
+            </a:r>
+          </a:p>
+        </p:txBody>
+      </p:sp>
+      <p:sp>
+        <p:nvSpPr>
+          <p:cNvPr id="13" name="TextBox 12"/>
+          <p:cNvSpPr txBox="1"/>
+          <p:nvPr/>
+        </p:nvSpPr>
+        <p:spPr>
+          <a:xfrm>
+            <a:off x="2468880" y="832104"/>
+            <a:ext cx="3200400" cy="201168"/>
+          </a:xfrm>
+          <a:prstGeom prst="rect">
+            <a:avLst/>
+          </a:prstGeom>
+          <a:noFill/>
+        </p:spPr>
+        <p:txBody>
+          <a:bodyPr wrap="square">
+            <a:spAutoFit/>
+          </a:bodyPr>
+          <a:lstStyle/>
+          <a:p>
+            <a:pPr algn="l">
+              <a:spcBef>
+                <a:spcPts val="0"/>
+              </a:spcBef>
+              <a:spcAft>
+                <a:spcPts val="0"/>
+              </a:spcAft>
+              <a:defRPr sz="1000" b="1">
+                <a:solidFill>
+                  <a:srgbClr val="1B2A4A"/>
+                </a:solidFill>
+                <a:latin typeface="Segoe UI"/>
+              </a:defRPr>
+            </a:pPr>
+            <a:r>
+              <a:t>FastAPI + Python</a:t>
+            </a:r>
+          </a:p>
+        </p:txBody>
+      </p:sp>
+      <p:sp>
+        <p:nvSpPr>
+          <p:cNvPr id="14" name="TextBox 13"/>
+          <p:cNvSpPr txBox="1"/>
+          <p:nvPr/>
+        </p:nvSpPr>
+        <p:spPr>
+          <a:xfrm>
+            <a:off x="5989320" y="832104"/>
+            <a:ext cx="3474720" cy="201168"/>
+          </a:xfrm>
+          <a:prstGeom prst="rect">
+            <a:avLst/>
+          </a:prstGeom>
+          <a:noFill/>
+        </p:spPr>
+        <p:txBody>
+          <a:bodyPr wrap="square">
+            <a:spAutoFit/>
+          </a:bodyPr>
+          <a:lstStyle/>
+          <a:p>
+            <a:pPr algn="r">
+              <a:spcBef>
+                <a:spcPts val="0"/>
+              </a:spcBef>
+              <a:spcAft>
+                <a:spcPts val="0"/>
+              </a:spcAft>
+              <a:defRPr sz="1000" b="1">
+                <a:solidFill>
+                  <a:srgbClr val="1B2A4A"/>
+                </a:solidFill>
+                <a:latin typeface="Segoe UI"/>
+              </a:defRPr>
+            </a:pPr>
+            <a:r>
+              <a:t>Agentic Intake System Backend</a:t>
+            </a:r>
+          </a:p>
+        </p:txBody>
+      </p:sp>
+      <p:sp>
+        <p:nvSpPr>
+          <p:cNvPr id="15" name="Rounded Rectangle 14"/>
+          <p:cNvSpPr/>
+          <p:nvPr/>
+        </p:nvSpPr>
+        <p:spPr>
+          <a:xfrm>
+            <a:off x="2468880" y="1188720"/>
+            <a:ext cx="6995160" cy="2834640"/>
+          </a:xfrm>
+          <a:prstGeom prst="roundRect">
+            <a:avLst/>
+          </a:prstGeom>
+          <a:solidFill>
+            <a:srgbClr val="DDE2EB"/>
           </a:solidFill>
           <a:ln w="12700">
             <a:solidFill>
@@ -3866,11 +3785,43 @@
           </a:fontRef>
         </p:style>
         <p:txBody>
-          <a:bodyPr rtlCol="0" anchor="ctr" wrap="square"/>
+          <a:bodyPr rtlCol="0" anchor="ctr"/>
+          <a:lstStyle/>
+          <a:p>
+            <a:pPr algn="ctr"/>
+          </a:p>
+        </p:txBody>
+      </p:sp>
+      <p:sp>
+        <p:nvSpPr>
+          <p:cNvPr id="16" name="TextBox 15"/>
+          <p:cNvSpPr txBox="1"/>
+          <p:nvPr/>
+        </p:nvSpPr>
+        <p:spPr>
+          <a:xfrm>
+            <a:off x="2606040" y="1234440"/>
+            <a:ext cx="3657600" cy="182880"/>
+          </a:xfrm>
+          <a:prstGeom prst="rect">
+            <a:avLst/>
+          </a:prstGeom>
+          <a:noFill/>
+        </p:spPr>
+        <p:txBody>
+          <a:bodyPr wrap="square">
+            <a:spAutoFit/>
+          </a:bodyPr>
           <a:lstStyle/>
           <a:p>
             <a:pPr algn="l">
-              <a:defRPr sz="700" b="1">
+              <a:spcBef>
+                <a:spcPts val="0"/>
+              </a:spcBef>
+              <a:spcAft>
+                <a:spcPts val="0"/>
+              </a:spcAft>
+              <a:defRPr sz="900" b="1">
                 <a:solidFill>
                   <a:srgbClr val="1B2A4A"/>
                 </a:solidFill>
@@ -3878,11 +3829,7 @@
               </a:defRPr>
             </a:pPr>
             <a:r>
-              <a:t>1. User selects an intake</a:t>
-            </a:r>
-            <a:br/>
-            <a:r>
-              <a:t>    from the catalog</a:t>
+              <a:t>Google ADK (Agent Development Kit)</a:t>
             </a:r>
           </a:p>
         </p:txBody>
@@ -3895,18 +3842,18 @@
         </p:nvSpPr>
         <p:spPr>
           <a:xfrm>
-            <a:off x="137160" y="3794760"/>
-            <a:ext cx="2103120" cy="365760"/>
+            <a:off x="7909560" y="1225296"/>
+            <a:ext cx="640080" cy="201168"/>
           </a:xfrm>
           <a:prstGeom prst="roundRect">
             <a:avLst/>
           </a:prstGeom>
           <a:solidFill>
-            <a:srgbClr val="F0F2F5"/>
+            <a:srgbClr val="E8F5E9"/>
           </a:solidFill>
           <a:ln w="12700">
             <a:solidFill>
-              <a:srgbClr val="B0B8C5"/>
+              <a:srgbClr val="2E7D32"/>
             </a:solidFill>
           </a:ln>
         </p:spPr>
@@ -3925,311 +3872,39 @@
           </a:fontRef>
         </p:style>
         <p:txBody>
-          <a:bodyPr rtlCol="0" anchor="ctr" wrap="square"/>
-          <a:lstStyle/>
-          <a:p>
-            <a:pPr algn="l">
-              <a:defRPr sz="700" b="1">
-                <a:solidFill>
-                  <a:srgbClr val="1B2A4A"/>
+          <a:bodyPr rtlCol="0" anchor="ctr" wrap="none"/>
+          <a:lstStyle/>
+          <a:p>
+            <a:pPr algn="ctr">
+              <a:defRPr sz="600" b="1">
+                <a:solidFill>
+                  <a:srgbClr val="2E7D32"/>
                 </a:solidFill>
                 <a:latin typeface="Segoe UI"/>
               </a:defRPr>
             </a:pPr>
             <a:r>
-              <a:t>6. User gets ticket ID</a:t>
-            </a:r>
-            <a:br/>
-            <a:r>
-              <a:t>    and confirmation via SSE</a:t>
-            </a:r>
-          </a:p>
-        </p:txBody>
-      </p:sp>
-      <p:sp>
-        <p:nvSpPr>
-          <p:cNvPr id="18" name="Rounded Rectangle 17"/>
+              <a:t>MVP1 — Quality  (ACTIVE)</a:t>
+            </a:r>
+          </a:p>
+        </p:txBody>
+      </p:sp>
+      <p:sp>
+        <p:nvSpPr>
+          <p:cNvPr id="18" name="Chevron 17"/>
           <p:cNvSpPr/>
           <p:nvPr/>
         </p:nvSpPr>
         <p:spPr>
           <a:xfrm>
-            <a:off x="2560320" y="731520"/>
-            <a:ext cx="7040880" cy="4114800"/>
-          </a:xfrm>
-          <a:prstGeom prst="roundRect">
+            <a:off x="2578608" y="1508760"/>
+            <a:ext cx="1280160" cy="594360"/>
+          </a:xfrm>
+          <a:prstGeom prst="chevron">
             <a:avLst/>
           </a:prstGeom>
           <a:solidFill>
-            <a:srgbClr val="EAEDF2"/>
-          </a:solidFill>
-          <a:ln w="25400">
-            <a:solidFill>
-              <a:srgbClr val="B0B8C5"/>
-            </a:solidFill>
-          </a:ln>
-        </p:spPr>
-        <p:style>
-          <a:lnRef idx="1">
-            <a:schemeClr val="accent1"/>
-          </a:lnRef>
-          <a:fillRef idx="3">
-            <a:schemeClr val="accent1"/>
-          </a:fillRef>
-          <a:effectRef idx="2">
-            <a:schemeClr val="accent1"/>
-          </a:effectRef>
-          <a:fontRef idx="minor">
-            <a:schemeClr val="lt1"/>
-          </a:fontRef>
-        </p:style>
-        <p:txBody>
-          <a:bodyPr rtlCol="0" anchor="ctr"/>
-          <a:lstStyle/>
-          <a:p>
-            <a:pPr algn="ctr"/>
-          </a:p>
-        </p:txBody>
-      </p:sp>
-      <p:sp>
-        <p:nvSpPr>
-          <p:cNvPr id="19" name="Oval 18"/>
-          <p:cNvSpPr/>
-          <p:nvPr/>
-        </p:nvSpPr>
-        <p:spPr>
-          <a:xfrm>
-            <a:off x="5760720" y="566928"/>
-            <a:ext cx="329184" cy="329184"/>
-          </a:xfrm>
-          <a:prstGeom prst="ellipse">
-            <a:avLst/>
-          </a:prstGeom>
-          <a:solidFill>
-            <a:srgbClr val="009688"/>
-          </a:solidFill>
-          <a:ln>
-            <a:noFill/>
-          </a:ln>
-        </p:spPr>
-        <p:style>
-          <a:lnRef idx="1">
-            <a:schemeClr val="accent1"/>
-          </a:lnRef>
-          <a:fillRef idx="3">
-            <a:schemeClr val="accent1"/>
-          </a:fillRef>
-          <a:effectRef idx="2">
-            <a:schemeClr val="accent1"/>
-          </a:effectRef>
-          <a:fontRef idx="minor">
-            <a:schemeClr val="lt1"/>
-          </a:fontRef>
-        </p:style>
-        <p:txBody>
-          <a:bodyPr rtlCol="0" anchor="ctr" wrap="none"/>
-          <a:lstStyle/>
-          <a:p>
-            <a:pPr algn="ctr">
-              <a:defRPr sz="1000">
-                <a:solidFill>
-                  <a:srgbClr val="FFFFFF"/>
-                </a:solidFill>
-              </a:defRPr>
-            </a:pPr>
-            <a:r>
-              <a:t>F</a:t>
-            </a:r>
-          </a:p>
-        </p:txBody>
-      </p:sp>
-      <p:sp>
-        <p:nvSpPr>
-          <p:cNvPr id="20" name="TextBox 19"/>
-          <p:cNvSpPr txBox="1"/>
-          <p:nvPr/>
-        </p:nvSpPr>
-        <p:spPr>
-          <a:xfrm>
-            <a:off x="2697480" y="804672"/>
-            <a:ext cx="2743200" cy="228600"/>
-          </a:xfrm>
-          <a:prstGeom prst="rect">
-            <a:avLst/>
-          </a:prstGeom>
-          <a:noFill/>
-        </p:spPr>
-        <p:txBody>
-          <a:bodyPr wrap="square">
-            <a:spAutoFit/>
-          </a:bodyPr>
-          <a:lstStyle/>
-          <a:p>
-            <a:pPr algn="l">
-              <a:spcBef>
-                <a:spcPts val="0"/>
-              </a:spcBef>
-              <a:spcAft>
-                <a:spcPts val="0"/>
-              </a:spcAft>
-              <a:defRPr sz="1000" b="1">
-                <a:solidFill>
-                  <a:srgbClr val="1B2A4A"/>
-                </a:solidFill>
-                <a:latin typeface="Segoe UI"/>
-              </a:defRPr>
-            </a:pPr>
-            <a:r>
-              <a:t>FastAPI + Python</a:t>
-            </a:r>
-          </a:p>
-        </p:txBody>
-      </p:sp>
-      <p:sp>
-        <p:nvSpPr>
-          <p:cNvPr id="21" name="TextBox 20"/>
-          <p:cNvSpPr txBox="1"/>
-          <p:nvPr/>
-        </p:nvSpPr>
-        <p:spPr>
-          <a:xfrm>
-            <a:off x="5760720" y="804672"/>
-            <a:ext cx="3657600" cy="228600"/>
-          </a:xfrm>
-          <a:prstGeom prst="rect">
-            <a:avLst/>
-          </a:prstGeom>
-          <a:noFill/>
-        </p:spPr>
-        <p:txBody>
-          <a:bodyPr wrap="square">
-            <a:spAutoFit/>
-          </a:bodyPr>
-          <a:lstStyle/>
-          <a:p>
-            <a:pPr algn="r">
-              <a:spcBef>
-                <a:spcPts val="0"/>
-              </a:spcBef>
-              <a:spcAft>
-                <a:spcPts val="0"/>
-              </a:spcAft>
-              <a:defRPr sz="1000" b="1">
-                <a:solidFill>
-                  <a:srgbClr val="1B2A4A"/>
-                </a:solidFill>
-                <a:latin typeface="Segoe UI"/>
-              </a:defRPr>
-            </a:pPr>
-            <a:r>
-              <a:t>Agentic Intake System Backend</a:t>
-            </a:r>
-          </a:p>
-        </p:txBody>
-      </p:sp>
-      <p:sp>
-        <p:nvSpPr>
-          <p:cNvPr id="22" name="Rounded Rectangle 21"/>
-          <p:cNvSpPr/>
-          <p:nvPr/>
-        </p:nvSpPr>
-        <p:spPr>
-          <a:xfrm>
-            <a:off x="2743200" y="1188720"/>
-            <a:ext cx="6675120" cy="3291840"/>
-          </a:xfrm>
-          <a:prstGeom prst="roundRect">
-            <a:avLst/>
-          </a:prstGeom>
-          <a:solidFill>
-            <a:srgbClr val="D8DEE8"/>
-          </a:solidFill>
-          <a:ln w="19050">
-            <a:solidFill>
-              <a:srgbClr val="B0B8C5"/>
-            </a:solidFill>
-          </a:ln>
-        </p:spPr>
-        <p:style>
-          <a:lnRef idx="1">
-            <a:schemeClr val="accent1"/>
-          </a:lnRef>
-          <a:fillRef idx="3">
-            <a:schemeClr val="accent1"/>
-          </a:fillRef>
-          <a:effectRef idx="2">
-            <a:schemeClr val="accent1"/>
-          </a:effectRef>
-          <a:fontRef idx="minor">
-            <a:schemeClr val="lt1"/>
-          </a:fontRef>
-        </p:style>
-        <p:txBody>
-          <a:bodyPr rtlCol="0" anchor="ctr"/>
-          <a:lstStyle/>
-          <a:p>
-            <a:pPr algn="ctr"/>
-          </a:p>
-        </p:txBody>
-      </p:sp>
-      <p:sp>
-        <p:nvSpPr>
-          <p:cNvPr id="23" name="TextBox 22"/>
-          <p:cNvSpPr txBox="1"/>
-          <p:nvPr/>
-        </p:nvSpPr>
-        <p:spPr>
-          <a:xfrm>
-            <a:off x="2880360" y="1234440"/>
-            <a:ext cx="4114800" cy="201168"/>
-          </a:xfrm>
-          <a:prstGeom prst="rect">
-            <a:avLst/>
-          </a:prstGeom>
-          <a:noFill/>
-        </p:spPr>
-        <p:txBody>
-          <a:bodyPr wrap="square">
-            <a:spAutoFit/>
-          </a:bodyPr>
-          <a:lstStyle/>
-          <a:p>
-            <a:pPr algn="l">
-              <a:spcBef>
-                <a:spcPts val="0"/>
-              </a:spcBef>
-              <a:spcAft>
-                <a:spcPts val="0"/>
-              </a:spcAft>
-              <a:defRPr sz="900" b="1">
-                <a:solidFill>
-                  <a:srgbClr val="1B2A4A"/>
-                </a:solidFill>
-                <a:latin typeface="Segoe UI"/>
-              </a:defRPr>
-            </a:pPr>
-            <a:r>
-              <a:t>Google ADK (Agent Development Kit) — MVP1 Pipeline</a:t>
-            </a:r>
-          </a:p>
-        </p:txBody>
-      </p:sp>
-      <p:sp>
-        <p:nvSpPr>
-          <p:cNvPr id="24" name="Chevron 23"/>
-          <p:cNvSpPr/>
-          <p:nvPr/>
-        </p:nvSpPr>
-        <p:spPr>
-          <a:xfrm>
-            <a:off x="2880360" y="1554480"/>
-            <a:ext cx="1143000" cy="777240"/>
-          </a:xfrm>
-          <a:prstGeom prst="chevron">
-            <a:avLst/>
-          </a:prstGeom>
-          <a:solidFill>
-            <a:srgbClr val="E0E8F0"/>
+            <a:srgbClr val="D5DEE8"/>
           </a:solidFill>
           <a:ln w="19050">
             <a:solidFill>
@@ -4256,7 +3931,7 @@
           <a:lstStyle/>
           <a:p>
             <a:pPr algn="ctr">
-              <a:defRPr sz="800" b="1">
+              <a:defRPr sz="900" b="1">
                 <a:solidFill>
                   <a:srgbClr val="1B2A4A"/>
                 </a:solidFill>
@@ -4264,78 +3939,21 @@
               </a:defRPr>
             </a:pPr>
             <a:r>
-              <a:t>Select</a:t>
-            </a:r>
-            <a:br/>
-            <a:r>
-              <a:t>Intake</a:t>
-            </a:r>
-          </a:p>
-        </p:txBody>
-      </p:sp>
-      <p:sp>
-        <p:nvSpPr>
-          <p:cNvPr id="25" name="Oval 24"/>
+              <a:t>Select Intake</a:t>
+            </a:r>
+          </a:p>
+        </p:txBody>
+      </p:sp>
+      <p:sp>
+        <p:nvSpPr>
+          <p:cNvPr id="19" name="Right Arrow 18"/>
           <p:cNvSpPr/>
           <p:nvPr/>
         </p:nvSpPr>
         <p:spPr>
           <a:xfrm>
-            <a:off x="3305556" y="1261872"/>
-            <a:ext cx="274320" cy="274320"/>
-          </a:xfrm>
-          <a:prstGeom prst="ellipse">
-            <a:avLst/>
-          </a:prstGeom>
-          <a:solidFill>
-            <a:srgbClr val="1B2A4A"/>
-          </a:solidFill>
-          <a:ln>
-            <a:noFill/>
-          </a:ln>
-        </p:spPr>
-        <p:style>
-          <a:lnRef idx="1">
-            <a:schemeClr val="accent1"/>
-          </a:lnRef>
-          <a:fillRef idx="3">
-            <a:schemeClr val="accent1"/>
-          </a:fillRef>
-          <a:effectRef idx="2">
-            <a:schemeClr val="accent1"/>
-          </a:effectRef>
-          <a:fontRef idx="minor">
-            <a:schemeClr val="lt1"/>
-          </a:fontRef>
-        </p:style>
-        <p:txBody>
-          <a:bodyPr rtlCol="0" anchor="ctr" wrap="none"/>
-          <a:lstStyle/>
-          <a:p>
-            <a:pPr algn="ctr">
-              <a:defRPr sz="1300" b="1">
-                <a:solidFill>
-                  <a:srgbClr val="FFFFFF"/>
-                </a:solidFill>
-                <a:latin typeface="Segoe UI"/>
-              </a:defRPr>
-            </a:pPr>
-            <a:r>
-              <a:t>1</a:t>
-            </a:r>
-          </a:p>
-        </p:txBody>
-      </p:sp>
-      <p:sp>
-        <p:nvSpPr>
-          <p:cNvPr id="26" name="Right Arrow 25"/>
-          <p:cNvSpPr/>
-          <p:nvPr/>
-        </p:nvSpPr>
-        <p:spPr>
-          <a:xfrm>
-            <a:off x="3977640" y="1879092"/>
-            <a:ext cx="228600" cy="128016"/>
+            <a:off x="3822192" y="1751076"/>
+            <a:ext cx="182880" cy="109728"/>
           </a:xfrm>
           <a:prstGeom prst="rightArrow">
             <a:avLst/>
@@ -4371,14 +3989,14 @@
       </p:sp>
       <p:sp>
         <p:nvSpPr>
-          <p:cNvPr id="27" name="Rounded Rectangle 26"/>
+          <p:cNvPr id="20" name="Rounded Rectangle 19"/>
           <p:cNvSpPr/>
           <p:nvPr/>
         </p:nvSpPr>
         <p:spPr>
           <a:xfrm>
-            <a:off x="2862072" y="2404872"/>
-            <a:ext cx="1179576" cy="594360"/>
+            <a:off x="2578608" y="2157984"/>
+            <a:ext cx="1280160" cy="502920"/>
           </a:xfrm>
           <a:prstGeom prst="roundRect">
             <a:avLst/>
@@ -4386,7 +4004,7 @@
           <a:solidFill>
             <a:srgbClr val="F5F6F8"/>
           </a:solidFill>
-          <a:ln w="9525">
+          <a:ln w="6350">
             <a:solidFill>
               <a:srgbClr val="B0B8C5"/>
             </a:solidFill>
@@ -4416,14 +4034,14 @@
       </p:sp>
       <p:sp>
         <p:nvSpPr>
-          <p:cNvPr id="28" name="TextBox 27"/>
+          <p:cNvPr id="21" name="TextBox 20"/>
           <p:cNvSpPr txBox="1"/>
           <p:nvPr/>
         </p:nvSpPr>
         <p:spPr>
           <a:xfrm>
-            <a:off x="2880360" y="2423160"/>
-            <a:ext cx="1143000" cy="548640"/>
+            <a:off x="2606040" y="2176272"/>
+            <a:ext cx="1225296" cy="457200"/>
           </a:xfrm>
           <a:prstGeom prst="rect">
             <a:avLst/>
@@ -4451,7 +4069,7 @@
               </a:defRPr>
             </a:pPr>
             <a:r>
-              <a:t>User browses catalog,</a:t>
+              <a:t>User browses catalog and</a:t>
             </a:r>
           </a:p>
           <a:p>
@@ -4470,46 +4088,27 @@
               </a:defRPr>
             </a:pPr>
             <a:r>
-              <a:t>clicks an enabled intake.</a:t>
-            </a:r>
-          </a:p>
-          <a:p>
-            <a:pPr algn="ctr">
-              <a:spcBef>
-                <a:spcPts val="0"/>
-              </a:spcBef>
-              <a:spcAft>
-                <a:spcPts val="0"/>
-              </a:spcAft>
-              <a:defRPr sz="600" b="0">
-                <a:solidFill>
-                  <a:srgbClr val="404A58"/>
-                </a:solidFill>
-                <a:latin typeface="Segoe UI"/>
-              </a:defRPr>
-            </a:pPr>
-            <a:r>
-              <a:t>POST /api/sessions called.</a:t>
-            </a:r>
-          </a:p>
-        </p:txBody>
-      </p:sp>
-      <p:sp>
-        <p:nvSpPr>
-          <p:cNvPr id="29" name="Chevron 28"/>
+              <a:t>clicks an enabled intake card.</a:t>
+            </a:r>
+          </a:p>
+        </p:txBody>
+      </p:sp>
+      <p:sp>
+        <p:nvSpPr>
+          <p:cNvPr id="22" name="Chevron 21"/>
           <p:cNvSpPr/>
           <p:nvPr/>
         </p:nvSpPr>
         <p:spPr>
           <a:xfrm>
-            <a:off x="4133088" y="1554480"/>
-            <a:ext cx="1143000" cy="777240"/>
+            <a:off x="3931920" y="1508760"/>
+            <a:ext cx="1280160" cy="594360"/>
           </a:xfrm>
           <a:prstGeom prst="chevron">
             <a:avLst/>
           </a:prstGeom>
           <a:solidFill>
-            <a:srgbClr val="E0E8F0"/>
+            <a:srgbClr val="D5DEE8"/>
           </a:solidFill>
           <a:ln w="19050">
             <a:solidFill>
@@ -4536,7 +4135,7 @@
           <a:lstStyle/>
           <a:p>
             <a:pPr algn="ctr">
-              <a:defRPr sz="800" b="1">
+              <a:defRPr sz="900" b="1">
                 <a:solidFill>
                   <a:srgbClr val="1B2A4A"/>
                 </a:solidFill>
@@ -4546,76 +4145,19 @@
             <a:r>
               <a:t>Load Config</a:t>
             </a:r>
-            <a:br/>
-            <a:r>
-              <a:t>&amp; Create Session</a:t>
-            </a:r>
-          </a:p>
-        </p:txBody>
-      </p:sp>
-      <p:sp>
-        <p:nvSpPr>
-          <p:cNvPr id="30" name="Oval 29"/>
+          </a:p>
+        </p:txBody>
+      </p:sp>
+      <p:sp>
+        <p:nvSpPr>
+          <p:cNvPr id="23" name="Right Arrow 22"/>
           <p:cNvSpPr/>
           <p:nvPr/>
         </p:nvSpPr>
         <p:spPr>
           <a:xfrm>
-            <a:off x="4558284" y="1261872"/>
-            <a:ext cx="274320" cy="274320"/>
-          </a:xfrm>
-          <a:prstGeom prst="ellipse">
-            <a:avLst/>
-          </a:prstGeom>
-          <a:solidFill>
-            <a:srgbClr val="1B2A4A"/>
-          </a:solidFill>
-          <a:ln>
-            <a:noFill/>
-          </a:ln>
-        </p:spPr>
-        <p:style>
-          <a:lnRef idx="1">
-            <a:schemeClr val="accent1"/>
-          </a:lnRef>
-          <a:fillRef idx="3">
-            <a:schemeClr val="accent1"/>
-          </a:fillRef>
-          <a:effectRef idx="2">
-            <a:schemeClr val="accent1"/>
-          </a:effectRef>
-          <a:fontRef idx="minor">
-            <a:schemeClr val="lt1"/>
-          </a:fontRef>
-        </p:style>
-        <p:txBody>
-          <a:bodyPr rtlCol="0" anchor="ctr" wrap="none"/>
-          <a:lstStyle/>
-          <a:p>
-            <a:pPr algn="ctr">
-              <a:defRPr sz="1300" b="1">
-                <a:solidFill>
-                  <a:srgbClr val="FFFFFF"/>
-                </a:solidFill>
-                <a:latin typeface="Segoe UI"/>
-              </a:defRPr>
-            </a:pPr>
-            <a:r>
-              <a:t>2</a:t>
-            </a:r>
-          </a:p>
-        </p:txBody>
-      </p:sp>
-      <p:sp>
-        <p:nvSpPr>
-          <p:cNvPr id="31" name="Right Arrow 30"/>
-          <p:cNvSpPr/>
-          <p:nvPr/>
-        </p:nvSpPr>
-        <p:spPr>
-          <a:xfrm>
-            <a:off x="5230368" y="1879092"/>
-            <a:ext cx="228600" cy="128016"/>
+            <a:off x="5175504" y="1751076"/>
+            <a:ext cx="182880" cy="109728"/>
           </a:xfrm>
           <a:prstGeom prst="rightArrow">
             <a:avLst/>
@@ -4651,14 +4193,14 @@
       </p:sp>
       <p:sp>
         <p:nvSpPr>
-          <p:cNvPr id="32" name="Rounded Rectangle 31"/>
+          <p:cNvPr id="24" name="Rounded Rectangle 23"/>
           <p:cNvSpPr/>
           <p:nvPr/>
         </p:nvSpPr>
         <p:spPr>
           <a:xfrm>
-            <a:off x="4114800" y="2404872"/>
-            <a:ext cx="1179576" cy="594360"/>
+            <a:off x="3931920" y="2157984"/>
+            <a:ext cx="1280160" cy="502920"/>
           </a:xfrm>
           <a:prstGeom prst="roundRect">
             <a:avLst/>
@@ -4666,7 +4208,7 @@
           <a:solidFill>
             <a:srgbClr val="F5F6F8"/>
           </a:solidFill>
-          <a:ln w="9525">
+          <a:ln w="6350">
             <a:solidFill>
               <a:srgbClr val="B0B8C5"/>
             </a:solidFill>
@@ -4696,14 +4238,14 @@
       </p:sp>
       <p:sp>
         <p:nvSpPr>
-          <p:cNvPr id="33" name="TextBox 32"/>
+          <p:cNvPr id="25" name="TextBox 24"/>
           <p:cNvSpPr txBox="1"/>
           <p:nvPr/>
         </p:nvSpPr>
         <p:spPr>
           <a:xfrm>
-            <a:off x="4133088" y="2423160"/>
-            <a:ext cx="1143000" cy="548640"/>
+            <a:off x="3959352" y="2176272"/>
+            <a:ext cx="1225296" cy="457200"/>
           </a:xfrm>
           <a:prstGeom prst="rect">
             <a:avLst/>
@@ -4731,7 +4273,7 @@
               </a:defRPr>
             </a:pPr>
             <a:r>
-              <a:t>Full YAML config loaded</a:t>
+              <a:t>Full YAML config loaded from</a:t>
             </a:r>
           </a:p>
           <a:p>
@@ -4750,7 +4292,7 @@
               </a:defRPr>
             </a:pPr>
             <a:r>
-              <a:t>from MongoDB. Session</a:t>
+              <a:t>MongoDB. Session created with</a:t>
             </a:r>
           </a:p>
           <a:p>
@@ -4769,46 +4311,27 @@
               </a:defRPr>
             </a:pPr>
             <a:r>
-              <a:t>created with config,</a:t>
-            </a:r>
-          </a:p>
-          <a:p>
-            <a:pPr algn="ctr">
-              <a:spcBef>
-                <a:spcPts val="0"/>
-              </a:spcBef>
-              <a:spcAft>
-                <a:spcPts val="0"/>
-              </a:spcAft>
-              <a:defRPr sz="600" b="0">
-                <a:solidFill>
-                  <a:srgbClr val="404A58"/>
-                </a:solidFill>
-                <a:latin typeface="Segoe UI"/>
-              </a:defRPr>
-            </a:pPr>
-            <a:r>
-              <a:t>answers={}, status=in_progress.</a:t>
-            </a:r>
-          </a:p>
-        </p:txBody>
-      </p:sp>
-      <p:sp>
-        <p:nvSpPr>
-          <p:cNvPr id="34" name="Chevron 33"/>
+              <a:t>config and empty answers.</a:t>
+            </a:r>
+          </a:p>
+        </p:txBody>
+      </p:sp>
+      <p:sp>
+        <p:nvSpPr>
+          <p:cNvPr id="26" name="Chevron 25"/>
           <p:cNvSpPr/>
           <p:nvPr/>
         </p:nvSpPr>
         <p:spPr>
           <a:xfrm>
-            <a:off x="5385816" y="1554480"/>
-            <a:ext cx="1143000" cy="777240"/>
+            <a:off x="5285232" y="1508760"/>
+            <a:ext cx="1280160" cy="594360"/>
           </a:xfrm>
           <a:prstGeom prst="chevron">
             <a:avLst/>
           </a:prstGeom>
           <a:solidFill>
-            <a:srgbClr val="E0E8F0"/>
+            <a:srgbClr val="D5DEE8"/>
           </a:solidFill>
           <a:ln w="19050">
             <a:solidFill>
@@ -4835,7 +4358,7 @@
           <a:lstStyle/>
           <a:p>
             <a:pPr algn="ctr">
-              <a:defRPr sz="800" b="1">
+              <a:defRPr sz="900" b="1">
                 <a:solidFill>
                   <a:srgbClr val="1B2A4A"/>
                 </a:solidFill>
@@ -4843,78 +4366,21 @@
               </a:defRPr>
             </a:pPr>
             <a:r>
-              <a:t>Ask &amp;</a:t>
-            </a:r>
-            <a:br/>
-            <a:r>
-              <a:t>Validate</a:t>
-            </a:r>
-          </a:p>
-        </p:txBody>
-      </p:sp>
-      <p:sp>
-        <p:nvSpPr>
-          <p:cNvPr id="35" name="Oval 34"/>
+              <a:t>Ask &amp; Validate</a:t>
+            </a:r>
+          </a:p>
+        </p:txBody>
+      </p:sp>
+      <p:sp>
+        <p:nvSpPr>
+          <p:cNvPr id="27" name="Right Arrow 26"/>
           <p:cNvSpPr/>
           <p:nvPr/>
         </p:nvSpPr>
         <p:spPr>
           <a:xfrm>
-            <a:off x="5811012" y="1261872"/>
-            <a:ext cx="274320" cy="274320"/>
-          </a:xfrm>
-          <a:prstGeom prst="ellipse">
-            <a:avLst/>
-          </a:prstGeom>
-          <a:solidFill>
-            <a:srgbClr val="1B2A4A"/>
-          </a:solidFill>
-          <a:ln>
-            <a:noFill/>
-          </a:ln>
-        </p:spPr>
-        <p:style>
-          <a:lnRef idx="1">
-            <a:schemeClr val="accent1"/>
-          </a:lnRef>
-          <a:fillRef idx="3">
-            <a:schemeClr val="accent1"/>
-          </a:fillRef>
-          <a:effectRef idx="2">
-            <a:schemeClr val="accent1"/>
-          </a:effectRef>
-          <a:fontRef idx="minor">
-            <a:schemeClr val="lt1"/>
-          </a:fontRef>
-        </p:style>
-        <p:txBody>
-          <a:bodyPr rtlCol="0" anchor="ctr" wrap="none"/>
-          <a:lstStyle/>
-          <a:p>
-            <a:pPr algn="ctr">
-              <a:defRPr sz="1300" b="1">
-                <a:solidFill>
-                  <a:srgbClr val="FFFFFF"/>
-                </a:solidFill>
-                <a:latin typeface="Segoe UI"/>
-              </a:defRPr>
-            </a:pPr>
-            <a:r>
-              <a:t>3</a:t>
-            </a:r>
-          </a:p>
-        </p:txBody>
-      </p:sp>
-      <p:sp>
-        <p:nvSpPr>
-          <p:cNvPr id="36" name="Right Arrow 35"/>
-          <p:cNvSpPr/>
-          <p:nvPr/>
-        </p:nvSpPr>
-        <p:spPr>
-          <a:xfrm>
-            <a:off x="6483096" y="1879092"/>
-            <a:ext cx="228600" cy="128016"/>
+            <a:off x="6528816" y="1751076"/>
+            <a:ext cx="182880" cy="109728"/>
           </a:xfrm>
           <a:prstGeom prst="rightArrow">
             <a:avLst/>
@@ -4950,14 +4416,14 @@
       </p:sp>
       <p:sp>
         <p:nvSpPr>
-          <p:cNvPr id="37" name="Rounded Rectangle 36"/>
+          <p:cNvPr id="28" name="Rounded Rectangle 27"/>
           <p:cNvSpPr/>
           <p:nvPr/>
         </p:nvSpPr>
         <p:spPr>
           <a:xfrm>
-            <a:off x="5367528" y="2404872"/>
-            <a:ext cx="1179576" cy="594360"/>
+            <a:off x="5285232" y="2157984"/>
+            <a:ext cx="1280160" cy="502920"/>
           </a:xfrm>
           <a:prstGeom prst="roundRect">
             <a:avLst/>
@@ -4965,7 +4431,7 @@
           <a:solidFill>
             <a:srgbClr val="F5F6F8"/>
           </a:solidFill>
-          <a:ln w="9525">
+          <a:ln w="6350">
             <a:solidFill>
               <a:srgbClr val="B0B8C5"/>
             </a:solidFill>
@@ -4995,14 +4461,14 @@
       </p:sp>
       <p:sp>
         <p:nvSpPr>
-          <p:cNvPr id="38" name="TextBox 37"/>
+          <p:cNvPr id="29" name="TextBox 28"/>
           <p:cNvSpPr txBox="1"/>
           <p:nvPr/>
         </p:nvSpPr>
         <p:spPr>
           <a:xfrm>
-            <a:off x="5385816" y="2423160"/>
-            <a:ext cx="1143000" cy="548640"/>
+            <a:off x="5312664" y="2176272"/>
+            <a:ext cx="1225296" cy="457200"/>
           </a:xfrm>
           <a:prstGeom prst="rect">
             <a:avLst/>
@@ -5030,7 +4496,7 @@
               </a:defRPr>
             </a:pPr>
             <a:r>
-              <a:t>Agent asks questions one at</a:t>
+              <a:t>Agent asks questions one at a</a:t>
             </a:r>
           </a:p>
           <a:p>
@@ -5049,7 +4515,7 @@
               </a:defRPr>
             </a:pPr>
             <a:r>
-              <a:t>a time. Validates answers</a:t>
+              <a:t>time. Validates against YAML</a:t>
             </a:r>
           </a:p>
           <a:p>
@@ -5068,46 +4534,27 @@
               </a:defRPr>
             </a:pPr>
             <a:r>
-              <a:t>against YAML criteria. Helps</a:t>
-            </a:r>
-          </a:p>
-          <a:p>
-            <a:pPr algn="ctr">
-              <a:spcBef>
-                <a:spcPts val="0"/>
-              </a:spcBef>
-              <a:spcAft>
-                <a:spcPts val="0"/>
-              </a:spcAft>
-              <a:defRPr sz="600" b="0">
-                <a:solidFill>
-                  <a:srgbClr val="404A58"/>
-                </a:solidFill>
-                <a:latin typeface="Segoe UI"/>
-              </a:defRPr>
-            </a:pPr>
-            <a:r>
-              <a:t>stuck users. Retries up to 3x.</a:t>
-            </a:r>
-          </a:p>
-        </p:txBody>
-      </p:sp>
-      <p:sp>
-        <p:nvSpPr>
-          <p:cNvPr id="39" name="Chevron 38"/>
+              <a:t>criteria. Helps stuck users.</a:t>
+            </a:r>
+          </a:p>
+        </p:txBody>
+      </p:sp>
+      <p:sp>
+        <p:nvSpPr>
+          <p:cNvPr id="30" name="Chevron 29"/>
           <p:cNvSpPr/>
           <p:nvPr/>
         </p:nvSpPr>
         <p:spPr>
           <a:xfrm>
-            <a:off x="6638544" y="1554480"/>
-            <a:ext cx="1143000" cy="777240"/>
+            <a:off x="6638544" y="1508760"/>
+            <a:ext cx="1280160" cy="594360"/>
           </a:xfrm>
           <a:prstGeom prst="chevron">
             <a:avLst/>
           </a:prstGeom>
           <a:solidFill>
-            <a:srgbClr val="E0E8F0"/>
+            <a:srgbClr val="D5DEE8"/>
           </a:solidFill>
           <a:ln w="19050">
             <a:solidFill>
@@ -5134,7 +4581,7 @@
           <a:lstStyle/>
           <a:p>
             <a:pPr algn="ctr">
-              <a:defRPr sz="800" b="1">
+              <a:defRPr sz="900" b="1">
                 <a:solidFill>
                   <a:srgbClr val="1B2A4A"/>
                 </a:solidFill>
@@ -5142,78 +4589,21 @@
               </a:defRPr>
             </a:pPr>
             <a:r>
-              <a:t>Review &amp;</a:t>
-            </a:r>
-            <a:br/>
-            <a:r>
-              <a:t>Confirm</a:t>
-            </a:r>
-          </a:p>
-        </p:txBody>
-      </p:sp>
-      <p:sp>
-        <p:nvSpPr>
-          <p:cNvPr id="40" name="Oval 39"/>
+              <a:t>Review &amp; Confirm</a:t>
+            </a:r>
+          </a:p>
+        </p:txBody>
+      </p:sp>
+      <p:sp>
+        <p:nvSpPr>
+          <p:cNvPr id="31" name="Right Arrow 30"/>
           <p:cNvSpPr/>
           <p:nvPr/>
         </p:nvSpPr>
         <p:spPr>
           <a:xfrm>
-            <a:off x="7063740" y="1261872"/>
-            <a:ext cx="274320" cy="274320"/>
-          </a:xfrm>
-          <a:prstGeom prst="ellipse">
-            <a:avLst/>
-          </a:prstGeom>
-          <a:solidFill>
-            <a:srgbClr val="1B2A4A"/>
-          </a:solidFill>
-          <a:ln>
-            <a:noFill/>
-          </a:ln>
-        </p:spPr>
-        <p:style>
-          <a:lnRef idx="1">
-            <a:schemeClr val="accent1"/>
-          </a:lnRef>
-          <a:fillRef idx="3">
-            <a:schemeClr val="accent1"/>
-          </a:fillRef>
-          <a:effectRef idx="2">
-            <a:schemeClr val="accent1"/>
-          </a:effectRef>
-          <a:fontRef idx="minor">
-            <a:schemeClr val="lt1"/>
-          </a:fontRef>
-        </p:style>
-        <p:txBody>
-          <a:bodyPr rtlCol="0" anchor="ctr" wrap="none"/>
-          <a:lstStyle/>
-          <a:p>
-            <a:pPr algn="ctr">
-              <a:defRPr sz="1300" b="1">
-                <a:solidFill>
-                  <a:srgbClr val="FFFFFF"/>
-                </a:solidFill>
-                <a:latin typeface="Segoe UI"/>
-              </a:defRPr>
-            </a:pPr>
-            <a:r>
-              <a:t>4</a:t>
-            </a:r>
-          </a:p>
-        </p:txBody>
-      </p:sp>
-      <p:sp>
-        <p:nvSpPr>
-          <p:cNvPr id="41" name="Right Arrow 40"/>
-          <p:cNvSpPr/>
-          <p:nvPr/>
-        </p:nvSpPr>
-        <p:spPr>
-          <a:xfrm>
-            <a:off x="7735824" y="1879092"/>
-            <a:ext cx="228600" cy="128016"/>
+            <a:off x="7882128" y="1751076"/>
+            <a:ext cx="182880" cy="109728"/>
           </a:xfrm>
           <a:prstGeom prst="rightArrow">
             <a:avLst/>
@@ -5249,14 +4639,14 @@
       </p:sp>
       <p:sp>
         <p:nvSpPr>
-          <p:cNvPr id="42" name="Rounded Rectangle 41"/>
+          <p:cNvPr id="32" name="Rounded Rectangle 31"/>
           <p:cNvSpPr/>
           <p:nvPr/>
         </p:nvSpPr>
         <p:spPr>
           <a:xfrm>
-            <a:off x="6620256" y="2404872"/>
-            <a:ext cx="1179576" cy="594360"/>
+            <a:off x="6638544" y="2157984"/>
+            <a:ext cx="1280160" cy="502920"/>
           </a:xfrm>
           <a:prstGeom prst="roundRect">
             <a:avLst/>
@@ -5264,7 +4654,7 @@
           <a:solidFill>
             <a:srgbClr val="F5F6F8"/>
           </a:solidFill>
-          <a:ln w="9525">
+          <a:ln w="6350">
             <a:solidFill>
               <a:srgbClr val="B0B8C5"/>
             </a:solidFill>
@@ -5294,14 +4684,14 @@
       </p:sp>
       <p:sp>
         <p:nvSpPr>
-          <p:cNvPr id="43" name="TextBox 42"/>
+          <p:cNvPr id="33" name="TextBox 32"/>
           <p:cNvSpPr txBox="1"/>
           <p:nvPr/>
         </p:nvSpPr>
         <p:spPr>
           <a:xfrm>
-            <a:off x="6638544" y="2423160"/>
-            <a:ext cx="1143000" cy="548640"/>
+            <a:off x="6665976" y="2176272"/>
+            <a:ext cx="1225296" cy="457200"/>
           </a:xfrm>
           <a:prstGeom prst="rect">
             <a:avLst/>
@@ -5329,7 +4719,7 @@
               </a:defRPr>
             </a:pPr>
             <a:r>
-              <a:t>All questions answered.</a:t>
+              <a:t>All questions answered. Agent</a:t>
             </a:r>
           </a:p>
           <a:p>
@@ -5348,7 +4738,7 @@
               </a:defRPr>
             </a:pPr>
             <a:r>
-              <a:t>Agent presents a formatted</a:t>
+              <a:t>presents formatted summary.</a:t>
             </a:r>
           </a:p>
           <a:p>
@@ -5367,46 +4757,27 @@
               </a:defRPr>
             </a:pPr>
             <a:r>
-              <a:t>summary of all Q&amp;A. User</a:t>
-            </a:r>
-          </a:p>
-          <a:p>
-            <a:pPr algn="ctr">
-              <a:spcBef>
-                <a:spcPts val="0"/>
-              </a:spcBef>
-              <a:spcAft>
-                <a:spcPts val="0"/>
-              </a:spcAft>
-              <a:defRPr sz="600" b="0">
-                <a:solidFill>
-                  <a:srgbClr val="404A58"/>
-                </a:solidFill>
-                <a:latin typeface="Segoe UI"/>
-              </a:defRPr>
-            </a:pPr>
-            <a:r>
-              <a:t>confirms or requests changes.</a:t>
-            </a:r>
-          </a:p>
-        </p:txBody>
-      </p:sp>
-      <p:sp>
-        <p:nvSpPr>
-          <p:cNvPr id="44" name="Chevron 43"/>
+              <a:t>User confirms or edits.</a:t>
+            </a:r>
+          </a:p>
+        </p:txBody>
+      </p:sp>
+      <p:sp>
+        <p:nvSpPr>
+          <p:cNvPr id="34" name="Chevron 33"/>
           <p:cNvSpPr/>
           <p:nvPr/>
         </p:nvSpPr>
         <p:spPr>
           <a:xfrm>
-            <a:off x="7891272" y="1554480"/>
-            <a:ext cx="1143000" cy="777240"/>
+            <a:off x="7991856" y="1508760"/>
+            <a:ext cx="1280160" cy="594360"/>
           </a:xfrm>
           <a:prstGeom prst="chevron">
             <a:avLst/>
           </a:prstGeom>
           <a:solidFill>
-            <a:srgbClr val="E0E8F0"/>
+            <a:srgbClr val="D5DEE8"/>
           </a:solidFill>
           <a:ln w="19050">
             <a:solidFill>
@@ -5433,7 +4804,7 @@
           <a:lstStyle/>
           <a:p>
             <a:pPr algn="ctr">
-              <a:defRPr sz="800" b="1">
+              <a:defRPr sz="900" b="1">
                 <a:solidFill>
                   <a:srgbClr val="1B2A4A"/>
                 </a:solidFill>
@@ -5441,34 +4812,32 @@
               </a:defRPr>
             </a:pPr>
             <a:r>
-              <a:t>Submit to</a:t>
-            </a:r>
-            <a:br/>
-            <a:r>
-              <a:t>Platform</a:t>
-            </a:r>
-          </a:p>
-        </p:txBody>
-      </p:sp>
-      <p:sp>
-        <p:nvSpPr>
-          <p:cNvPr id="45" name="Oval 44"/>
+              <a:t>Submit to Platform</a:t>
+            </a:r>
+          </a:p>
+        </p:txBody>
+      </p:sp>
+      <p:sp>
+        <p:nvSpPr>
+          <p:cNvPr id="35" name="Rounded Rectangle 34"/>
           <p:cNvSpPr/>
           <p:nvPr/>
         </p:nvSpPr>
         <p:spPr>
           <a:xfrm>
-            <a:off x="8316468" y="1261872"/>
-            <a:ext cx="274320" cy="274320"/>
-          </a:xfrm>
-          <a:prstGeom prst="ellipse">
+            <a:off x="7991856" y="2157984"/>
+            <a:ext cx="1280160" cy="502920"/>
+          </a:xfrm>
+          <a:prstGeom prst="roundRect">
             <a:avLst/>
           </a:prstGeom>
           <a:solidFill>
-            <a:srgbClr val="1B2A4A"/>
+            <a:srgbClr val="F5F6F8"/>
           </a:solidFill>
-          <a:ln>
-            <a:noFill/>
+          <a:ln w="6350">
+            <a:solidFill>
+              <a:srgbClr val="B0B8C5"/>
+            </a:solidFill>
           </a:ln>
         </p:spPr>
         <p:style>
@@ -5486,61 +4855,6 @@
           </a:fontRef>
         </p:style>
         <p:txBody>
-          <a:bodyPr rtlCol="0" anchor="ctr" wrap="none"/>
-          <a:lstStyle/>
-          <a:p>
-            <a:pPr algn="ctr">
-              <a:defRPr sz="1300" b="1">
-                <a:solidFill>
-                  <a:srgbClr val="FFFFFF"/>
-                </a:solidFill>
-                <a:latin typeface="Segoe UI"/>
-              </a:defRPr>
-            </a:pPr>
-            <a:r>
-              <a:t>5</a:t>
-            </a:r>
-          </a:p>
-        </p:txBody>
-      </p:sp>
-      <p:sp>
-        <p:nvSpPr>
-          <p:cNvPr id="46" name="Rounded Rectangle 45"/>
-          <p:cNvSpPr/>
-          <p:nvPr/>
-        </p:nvSpPr>
-        <p:spPr>
-          <a:xfrm>
-            <a:off x="7872984" y="2404872"/>
-            <a:ext cx="1179576" cy="594360"/>
-          </a:xfrm>
-          <a:prstGeom prst="roundRect">
-            <a:avLst/>
-          </a:prstGeom>
-          <a:solidFill>
-            <a:srgbClr val="F5F6F8"/>
-          </a:solidFill>
-          <a:ln w="9525">
-            <a:solidFill>
-              <a:srgbClr val="B0B8C5"/>
-            </a:solidFill>
-          </a:ln>
-        </p:spPr>
-        <p:style>
-          <a:lnRef idx="1">
-            <a:schemeClr val="accent1"/>
-          </a:lnRef>
-          <a:fillRef idx="3">
-            <a:schemeClr val="accent1"/>
-          </a:fillRef>
-          <a:effectRef idx="2">
-            <a:schemeClr val="accent1"/>
-          </a:effectRef>
-          <a:fontRef idx="minor">
-            <a:schemeClr val="lt1"/>
-          </a:fontRef>
-        </p:style>
-        <p:txBody>
           <a:bodyPr rtlCol="0" anchor="ctr"/>
           <a:lstStyle/>
           <a:p>
@@ -5550,14 +4864,14 @@
       </p:sp>
       <p:sp>
         <p:nvSpPr>
-          <p:cNvPr id="47" name="TextBox 46"/>
+          <p:cNvPr id="36" name="TextBox 35"/>
           <p:cNvSpPr txBox="1"/>
           <p:nvPr/>
         </p:nvSpPr>
         <p:spPr>
           <a:xfrm>
-            <a:off x="7891272" y="2423160"/>
-            <a:ext cx="1143000" cy="548640"/>
+            <a:off x="8019288" y="2176272"/>
+            <a:ext cx="1225296" cy="457200"/>
           </a:xfrm>
           <a:prstGeom prst="rect">
             <a:avLst/>
@@ -5604,7 +4918,7 @@
               </a:defRPr>
             </a:pPr>
             <a:r>
-              <a:t>fields via field_aggregation.</a:t>
+              <a:t>fields. Adapter dispatches</a:t>
             </a:r>
           </a:p>
           <a:p>
@@ -5623,245 +4937,21 @@
               </a:defRPr>
             </a:pPr>
             <a:r>
-              <a:t>Adapter dispatches to Jira</a:t>
-            </a:r>
-          </a:p>
-          <a:p>
-            <a:pPr algn="ctr">
-              <a:spcBef>
-                <a:spcPts val="0"/>
-              </a:spcBef>
-              <a:spcAft>
-                <a:spcPts val="0"/>
-              </a:spcAft>
-              <a:defRPr sz="600" b="0">
-                <a:solidFill>
-                  <a:srgbClr val="404A58"/>
-                </a:solidFill>
-                <a:latin typeface="Segoe UI"/>
-              </a:defRPr>
-            </a:pPr>
-            <a:r>
-              <a:t>(or StoryDev in MVP4).</a:t>
-            </a:r>
-          </a:p>
-        </p:txBody>
-      </p:sp>
-      <p:sp>
-        <p:nvSpPr>
-          <p:cNvPr id="48" name="Rounded Rectangle 47"/>
+              <a:t>to Jira via adapter registry.</a:t>
+            </a:r>
+          </a:p>
+        </p:txBody>
+      </p:sp>
+      <p:sp>
+        <p:nvSpPr>
+          <p:cNvPr id="37" name="Rounded Rectangle 36"/>
           <p:cNvSpPr/>
           <p:nvPr/>
         </p:nvSpPr>
         <p:spPr>
           <a:xfrm>
-            <a:off x="7772400" y="1207008"/>
-            <a:ext cx="1463040" cy="228600"/>
-          </a:xfrm>
-          <a:prstGeom prst="roundRect">
-            <a:avLst/>
-          </a:prstGeom>
-          <a:solidFill>
-            <a:srgbClr val="E8F5E9"/>
-          </a:solidFill>
-          <a:ln w="19050">
-            <a:solidFill>
-              <a:srgbClr val="2E7D32"/>
-            </a:solidFill>
-          </a:ln>
-        </p:spPr>
-        <p:style>
-          <a:lnRef idx="1">
-            <a:schemeClr val="accent1"/>
-          </a:lnRef>
-          <a:fillRef idx="3">
-            <a:schemeClr val="accent1"/>
-          </a:fillRef>
-          <a:effectRef idx="2">
-            <a:schemeClr val="accent1"/>
-          </a:effectRef>
-          <a:fontRef idx="minor">
-            <a:schemeClr val="lt1"/>
-          </a:fontRef>
-        </p:style>
-        <p:txBody>
-          <a:bodyPr rtlCol="0" anchor="ctr" wrap="none"/>
-          <a:lstStyle/>
-          <a:p>
-            <a:pPr algn="ctr">
-              <a:defRPr sz="700" b="1">
-                <a:solidFill>
-                  <a:srgbClr val="2E7D32"/>
-                </a:solidFill>
-                <a:latin typeface="Segoe UI"/>
-              </a:defRPr>
-            </a:pPr>
-            <a:r>
-              <a:t>MVP1 — Quality  (ACTIVE)</a:t>
-            </a:r>
-          </a:p>
-        </p:txBody>
-      </p:sp>
-      <p:cxnSp>
-        <p:nvCxnSpPr>
-          <p:cNvPr id="49" name="Connector 48"/>
-          <p:cNvCxnSpPr/>
-          <p:nvPr/>
-        </p:nvCxnSpPr>
-        <p:spPr>
-          <a:xfrm>
-            <a:off x="5957316.0" y="2999232"/>
-            <a:ext cx="0.0" cy="182880"/>
-          </a:xfrm>
-          <a:prstGeom prst="line">
-            <a:avLst/>
-          </a:prstGeom>
-          <a:ln w="19050">
-            <a:solidFill>
-              <a:srgbClr val="CC0000"/>
-            </a:solidFill>
-            <a:prstDash val="sysDash"/>
-          </a:ln>
-        </p:spPr>
-        <p:style>
-          <a:lnRef idx="2">
-            <a:schemeClr val="accent1"/>
-          </a:lnRef>
-          <a:fillRef idx="0">
-            <a:schemeClr val="accent1"/>
-          </a:fillRef>
-          <a:effectRef idx="1">
-            <a:schemeClr val="accent1"/>
-          </a:effectRef>
-          <a:fontRef idx="minor">
-            <a:schemeClr val="tx1"/>
-          </a:fontRef>
-        </p:style>
-      </p:cxnSp>
-      <p:cxnSp>
-        <p:nvCxnSpPr>
-          <p:cNvPr id="50" name="Connector 49"/>
-          <p:cNvCxnSpPr/>
-          <p:nvPr/>
-        </p:nvCxnSpPr>
-        <p:spPr>
-          <a:xfrm flipH="1">
-            <a:off x="5367528" y="3182112"/>
-            <a:ext cx="589788.0" cy="0"/>
-          </a:xfrm>
-          <a:prstGeom prst="line">
-            <a:avLst/>
-          </a:prstGeom>
-          <a:ln w="19050">
-            <a:solidFill>
-              <a:srgbClr val="CC0000"/>
-            </a:solidFill>
-            <a:prstDash val="sysDash"/>
-          </a:ln>
-        </p:spPr>
-        <p:style>
-          <a:lnRef idx="2">
-            <a:schemeClr val="accent1"/>
-          </a:lnRef>
-          <a:fillRef idx="0">
-            <a:schemeClr val="accent1"/>
-          </a:fillRef>
-          <a:effectRef idx="1">
-            <a:schemeClr val="accent1"/>
-          </a:effectRef>
-          <a:fontRef idx="minor">
-            <a:schemeClr val="tx1"/>
-          </a:fontRef>
-        </p:style>
-      </p:cxnSp>
-      <p:cxnSp>
-        <p:nvCxnSpPr>
-          <p:cNvPr id="51" name="Connector 50"/>
-          <p:cNvCxnSpPr/>
-          <p:nvPr/>
-        </p:nvCxnSpPr>
-        <p:spPr>
-          <a:xfrm flipV="1">
-            <a:off x="5367528" y="2999232"/>
-            <a:ext cx="0" cy="182880"/>
-          </a:xfrm>
-          <a:prstGeom prst="line">
-            <a:avLst/>
-          </a:prstGeom>
-          <a:ln w="19050">
-            <a:solidFill>
-              <a:srgbClr val="CC0000"/>
-            </a:solidFill>
-            <a:prstDash val="sysDash"/>
-          </a:ln>
-        </p:spPr>
-        <p:style>
-          <a:lnRef idx="2">
-            <a:schemeClr val="accent1"/>
-          </a:lnRef>
-          <a:fillRef idx="0">
-            <a:schemeClr val="accent1"/>
-          </a:fillRef>
-          <a:effectRef idx="1">
-            <a:schemeClr val="accent1"/>
-          </a:effectRef>
-          <a:fontRef idx="minor">
-            <a:schemeClr val="tx1"/>
-          </a:fontRef>
-        </p:style>
-      </p:cxnSp>
-      <p:sp>
-        <p:nvSpPr>
-          <p:cNvPr id="52" name="TextBox 51"/>
-          <p:cNvSpPr txBox="1"/>
-          <p:nvPr/>
-        </p:nvSpPr>
-        <p:spPr>
-          <a:xfrm>
-            <a:off x="5248656" y="3044952"/>
-            <a:ext cx="914400" cy="164592"/>
-          </a:xfrm>
-          <a:prstGeom prst="rect">
-            <a:avLst/>
-          </a:prstGeom>
-          <a:noFill/>
-        </p:spPr>
-        <p:txBody>
-          <a:bodyPr wrap="square">
-            <a:spAutoFit/>
-          </a:bodyPr>
-          <a:lstStyle/>
-          <a:p>
-            <a:pPr algn="ctr">
-              <a:spcBef>
-                <a:spcPts val="0"/>
-              </a:spcBef>
-              <a:spcAft>
-                <a:spcPts val="0"/>
-              </a:spcAft>
-              <a:defRPr sz="600" b="1">
-                <a:solidFill>
-                  <a:srgbClr val="CC0000"/>
-                </a:solidFill>
-                <a:latin typeface="Segoe UI"/>
-              </a:defRPr>
-            </a:pPr>
-            <a:r>
-              <a:t>Retry (up to 3x)</a:t>
-            </a:r>
-          </a:p>
-        </p:txBody>
-      </p:sp>
-      <p:sp>
-        <p:nvSpPr>
-          <p:cNvPr id="53" name="Rounded Rectangle 52"/>
-          <p:cNvSpPr/>
-          <p:nvPr/>
-        </p:nvSpPr>
-        <p:spPr>
-          <a:xfrm>
-            <a:off x="2880360" y="3364992"/>
-            <a:ext cx="2011680" cy="548640"/>
+            <a:off x="2578608" y="2743200"/>
+            <a:ext cx="2194560" cy="457200"/>
           </a:xfrm>
           <a:prstGeom prst="roundRect">
             <a:avLst/>
@@ -5902,24 +4992,20 @@
               </a:defRPr>
             </a:pPr>
             <a:r>
-              <a:t>MVP2 — Duplicate Detection</a:t>
-            </a:r>
-            <a:br/>
-            <a:r>
-              <a:t>(exact + fuzzy + semantic)</a:t>
-            </a:r>
-          </a:p>
-        </p:txBody>
-      </p:sp>
-      <p:sp>
-        <p:nvSpPr>
-          <p:cNvPr id="54" name="Rounded Rectangle 53"/>
+              <a:t>MVP2 — Duplicate Detection (exact + fuzzy + semantic)</a:t>
+            </a:r>
+          </a:p>
+        </p:txBody>
+      </p:sp>
+      <p:sp>
+        <p:nvSpPr>
+          <p:cNvPr id="38" name="Rounded Rectangle 37"/>
           <p:cNvSpPr/>
           <p:nvPr/>
         </p:nvSpPr>
         <p:spPr>
           <a:xfrm>
-            <a:off x="4224528" y="3255264"/>
+            <a:off x="4105656" y="2633472"/>
             <a:ext cx="640080" cy="201168"/>
           </a:xfrm>
           <a:prstGeom prst="roundRect">
@@ -5968,14 +5054,14 @@
       </p:sp>
       <p:sp>
         <p:nvSpPr>
-          <p:cNvPr id="55" name="Rounded Rectangle 54"/>
+          <p:cNvPr id="39" name="Rounded Rectangle 38"/>
           <p:cNvSpPr/>
           <p:nvPr/>
         </p:nvSpPr>
         <p:spPr>
           <a:xfrm>
-            <a:off x="4983480" y="3364992"/>
-            <a:ext cx="2011680" cy="548640"/>
+            <a:off x="4864608" y="2743200"/>
+            <a:ext cx="2194560" cy="457200"/>
           </a:xfrm>
           <a:prstGeom prst="roundRect">
             <a:avLst/>
@@ -6016,24 +5102,20 @@
               </a:defRPr>
             </a:pPr>
             <a:r>
-              <a:t>MVP3 — Intake Classification</a:t>
-            </a:r>
-            <a:br/>
-            <a:r>
-              <a:t>(auto-categorize requests)</a:t>
-            </a:r>
-          </a:p>
-        </p:txBody>
-      </p:sp>
-      <p:sp>
-        <p:nvSpPr>
-          <p:cNvPr id="56" name="Rounded Rectangle 55"/>
+              <a:t>MVP3 — Intake Classification (auto-categorize)</a:t>
+            </a:r>
+          </a:p>
+        </p:txBody>
+      </p:sp>
+      <p:sp>
+        <p:nvSpPr>
+          <p:cNvPr id="40" name="Rounded Rectangle 39"/>
           <p:cNvSpPr/>
           <p:nvPr/>
         </p:nvSpPr>
         <p:spPr>
           <a:xfrm>
-            <a:off x="6327648" y="3255264"/>
+            <a:off x="6391656" y="2633472"/>
             <a:ext cx="640080" cy="201168"/>
           </a:xfrm>
           <a:prstGeom prst="roundRect">
@@ -6082,14 +5164,14 @@
       </p:sp>
       <p:sp>
         <p:nvSpPr>
-          <p:cNvPr id="57" name="Rounded Rectangle 56"/>
+          <p:cNvPr id="41" name="Rounded Rectangle 40"/>
           <p:cNvSpPr/>
           <p:nvPr/>
         </p:nvSpPr>
         <p:spPr>
           <a:xfrm>
-            <a:off x="7086600" y="3364992"/>
-            <a:ext cx="2011680" cy="548640"/>
+            <a:off x="7150608" y="2743200"/>
+            <a:ext cx="2194560" cy="457200"/>
           </a:xfrm>
           <a:prstGeom prst="roundRect">
             <a:avLst/>
@@ -6130,24 +5212,20 @@
               </a:defRPr>
             </a:pPr>
             <a:r>
-              <a:t>MVP4 — Agile Artifact Creation</a:t>
-            </a:r>
-            <a:br/>
-            <a:r>
-              <a:t>(StoryDev: Epics &amp; Features)</a:t>
-            </a:r>
-          </a:p>
-        </p:txBody>
-      </p:sp>
-      <p:sp>
-        <p:nvSpPr>
-          <p:cNvPr id="58" name="Rounded Rectangle 57"/>
+              <a:t>MVP4 — Agile Artifacts (StoryDev: Epics &amp; Features)</a:t>
+            </a:r>
+          </a:p>
+        </p:txBody>
+      </p:sp>
+      <p:sp>
+        <p:nvSpPr>
+          <p:cNvPr id="42" name="Rounded Rectangle 41"/>
           <p:cNvSpPr/>
           <p:nvPr/>
         </p:nvSpPr>
         <p:spPr>
           <a:xfrm>
-            <a:off x="8430768" y="3255264"/>
+            <a:off x="8677656" y="2633472"/>
             <a:ext cx="640080" cy="201168"/>
           </a:xfrm>
           <a:prstGeom prst="roundRect">
@@ -6196,120 +5274,14 @@
       </p:sp>
       <p:sp>
         <p:nvSpPr>
-          <p:cNvPr id="59" name="Oval 58"/>
+          <p:cNvPr id="43" name="Rounded Rectangle 42"/>
           <p:cNvSpPr/>
           <p:nvPr/>
         </p:nvSpPr>
         <p:spPr>
           <a:xfrm>
-            <a:off x="2834640" y="4416552"/>
-            <a:ext cx="274320" cy="274320"/>
-          </a:xfrm>
-          <a:prstGeom prst="ellipse">
-            <a:avLst/>
-          </a:prstGeom>
-          <a:solidFill>
-            <a:srgbClr val="1B2A4A"/>
-          </a:solidFill>
-          <a:ln>
-            <a:noFill/>
-          </a:ln>
-        </p:spPr>
-        <p:style>
-          <a:lnRef idx="1">
-            <a:schemeClr val="accent1"/>
-          </a:lnRef>
-          <a:fillRef idx="3">
-            <a:schemeClr val="accent1"/>
-          </a:fillRef>
-          <a:effectRef idx="2">
-            <a:schemeClr val="accent1"/>
-          </a:effectRef>
-          <a:fontRef idx="minor">
-            <a:schemeClr val="lt1"/>
-          </a:fontRef>
-        </p:style>
-        <p:txBody>
-          <a:bodyPr rtlCol="0" anchor="ctr" wrap="none"/>
-          <a:lstStyle/>
-          <a:p>
-            <a:pPr algn="ctr">
-              <a:defRPr sz="1300" b="1">
-                <a:solidFill>
-                  <a:srgbClr val="FFFFFF"/>
-                </a:solidFill>
-                <a:latin typeface="Segoe UI"/>
-              </a:defRPr>
-            </a:pPr>
-            <a:r>
-              <a:t>2</a:t>
-            </a:r>
-          </a:p>
-        </p:txBody>
-      </p:sp>
-      <p:sp>
-        <p:nvSpPr>
-          <p:cNvPr id="60" name="Oval 59"/>
-          <p:cNvSpPr/>
-          <p:nvPr/>
-        </p:nvSpPr>
-        <p:spPr>
-          <a:xfrm>
-            <a:off x="5212080" y="4416552"/>
-            <a:ext cx="274320" cy="274320"/>
-          </a:xfrm>
-          <a:prstGeom prst="ellipse">
-            <a:avLst/>
-          </a:prstGeom>
-          <a:solidFill>
-            <a:srgbClr val="1B2A4A"/>
-          </a:solidFill>
-          <a:ln>
-            <a:noFill/>
-          </a:ln>
-        </p:spPr>
-        <p:style>
-          <a:lnRef idx="1">
-            <a:schemeClr val="accent1"/>
-          </a:lnRef>
-          <a:fillRef idx="3">
-            <a:schemeClr val="accent1"/>
-          </a:fillRef>
-          <a:effectRef idx="2">
-            <a:schemeClr val="accent1"/>
-          </a:effectRef>
-          <a:fontRef idx="minor">
-            <a:schemeClr val="lt1"/>
-          </a:fontRef>
-        </p:style>
-        <p:txBody>
-          <a:bodyPr rtlCol="0" anchor="ctr" wrap="none"/>
-          <a:lstStyle/>
-          <a:p>
-            <a:pPr algn="ctr">
-              <a:defRPr sz="1300" b="1">
-                <a:solidFill>
-                  <a:srgbClr val="FFFFFF"/>
-                </a:solidFill>
-                <a:latin typeface="Segoe UI"/>
-              </a:defRPr>
-            </a:pPr>
-            <a:r>
-              <a:t>3</a:t>
-            </a:r>
-          </a:p>
-        </p:txBody>
-      </p:sp>
-      <p:sp>
-        <p:nvSpPr>
-          <p:cNvPr id="61" name="Rounded Rectangle 60"/>
-          <p:cNvSpPr/>
-          <p:nvPr/>
-        </p:nvSpPr>
-        <p:spPr>
-          <a:xfrm>
-            <a:off x="3063240" y="4389120"/>
-            <a:ext cx="2148840" cy="347472"/>
+            <a:off x="2468880" y="3959352"/>
+            <a:ext cx="2240280" cy="320040"/>
           </a:xfrm>
           <a:prstGeom prst="roundRect">
             <a:avLst/>
@@ -6350,25 +5322,25 @@
               </a:defRPr>
             </a:pPr>
             <a:r>
-              <a:t>Adapter Registry (Jira, Test,</a:t>
+              <a:t>Adapter Registry</a:t>
             </a:r>
             <a:br/>
             <a:r>
-              <a:t>Webhook)</a:t>
-            </a:r>
-          </a:p>
-        </p:txBody>
-      </p:sp>
-      <p:sp>
-        <p:nvSpPr>
-          <p:cNvPr id="62" name="Rounded Rectangle 61"/>
+              <a:t>(Jira, Test, Webhook)</a:t>
+            </a:r>
+          </a:p>
+        </p:txBody>
+      </p:sp>
+      <p:sp>
+        <p:nvSpPr>
+          <p:cNvPr id="44" name="Rounded Rectangle 43"/>
           <p:cNvSpPr/>
           <p:nvPr/>
         </p:nvSpPr>
         <p:spPr>
           <a:xfrm>
-            <a:off x="5257800" y="4389120"/>
-            <a:ext cx="2148840" cy="347472"/>
+            <a:off x="4782312" y="3959352"/>
+            <a:ext cx="2240280" cy="320040"/>
           </a:xfrm>
           <a:prstGeom prst="roundRect">
             <a:avLst/>
@@ -6420,14 +5392,14 @@
       </p:sp>
       <p:sp>
         <p:nvSpPr>
-          <p:cNvPr id="63" name="Rounded Rectangle 62"/>
+          <p:cNvPr id="45" name="Rounded Rectangle 44"/>
           <p:cNvSpPr/>
           <p:nvPr/>
         </p:nvSpPr>
         <p:spPr>
           <a:xfrm>
-            <a:off x="7452360" y="4389120"/>
-            <a:ext cx="2148840" cy="347472"/>
+            <a:off x="7095744" y="3959352"/>
+            <a:ext cx="2240280" cy="320040"/>
           </a:xfrm>
           <a:prstGeom prst="roundRect">
             <a:avLst/>
@@ -6472,21 +5444,21 @@
             </a:r>
             <a:br/>
             <a:r>
-              <a:t>(4 structured streams)</a:t>
-            </a:r>
-          </a:p>
-        </p:txBody>
-      </p:sp>
-      <p:sp>
-        <p:nvSpPr>
-          <p:cNvPr id="64" name="Rounded Rectangle 63"/>
+              <a:t>(4 structured log streams)</a:t>
+            </a:r>
+          </a:p>
+        </p:txBody>
+      </p:sp>
+      <p:sp>
+        <p:nvSpPr>
+          <p:cNvPr id="46" name="Rounded Rectangle 45"/>
           <p:cNvSpPr/>
           <p:nvPr/>
         </p:nvSpPr>
         <p:spPr>
           <a:xfrm>
-            <a:off x="9829800" y="1371600"/>
-            <a:ext cx="2148840" cy="1920240"/>
+            <a:off x="9829800" y="1097280"/>
+            <a:ext cx="2148840" cy="1828800"/>
           </a:xfrm>
           <a:prstGeom prst="roundRect">
             <a:avLst/>
@@ -6524,13 +5496,13 @@
       </p:sp>
       <p:sp>
         <p:nvSpPr>
-          <p:cNvPr id="65" name="TextBox 64"/>
+          <p:cNvPr id="47" name="TextBox 46"/>
           <p:cNvSpPr txBox="1"/>
           <p:nvPr/>
         </p:nvSpPr>
         <p:spPr>
           <a:xfrm>
-            <a:off x="9829800" y="1426464"/>
+            <a:off x="9829800" y="1152144"/>
             <a:ext cx="2148840" cy="201168"/>
           </a:xfrm>
           <a:prstGeom prst="rect">
@@ -6566,13 +5538,13 @@
       </p:sp>
       <p:sp>
         <p:nvSpPr>
-          <p:cNvPr id="66" name="Rounded Rectangle 65"/>
+          <p:cNvPr id="48" name="Rounded Rectangle 47"/>
           <p:cNvSpPr/>
           <p:nvPr/>
         </p:nvSpPr>
         <p:spPr>
           <a:xfrm>
-            <a:off x="9939528" y="1691640"/>
+            <a:off x="9939528" y="1417320"/>
             <a:ext cx="1920240" cy="411480"/>
           </a:xfrm>
           <a:prstGeom prst="roundRect">
@@ -6621,13 +5593,13 @@
       </p:sp>
       <p:sp>
         <p:nvSpPr>
-          <p:cNvPr id="67" name="Rounded Rectangle 66"/>
+          <p:cNvPr id="49" name="Rounded Rectangle 48"/>
           <p:cNvSpPr/>
           <p:nvPr/>
         </p:nvSpPr>
         <p:spPr>
           <a:xfrm>
-            <a:off x="9939528" y="2194560"/>
+            <a:off x="9939528" y="1920240"/>
             <a:ext cx="1920240" cy="411480"/>
           </a:xfrm>
           <a:prstGeom prst="roundRect">
@@ -6676,13 +5648,13 @@
       </p:sp>
       <p:sp>
         <p:nvSpPr>
-          <p:cNvPr id="68" name="Rounded Rectangle 67"/>
+          <p:cNvPr id="50" name="Rounded Rectangle 49"/>
           <p:cNvSpPr/>
           <p:nvPr/>
         </p:nvSpPr>
         <p:spPr>
           <a:xfrm>
-            <a:off x="9939528" y="2697480"/>
+            <a:off x="9939528" y="2377440"/>
             <a:ext cx="1920240" cy="411480"/>
           </a:xfrm>
           <a:prstGeom prst="roundRect">
@@ -6731,14 +5703,14 @@
       </p:sp>
       <p:sp>
         <p:nvSpPr>
-          <p:cNvPr id="69" name="Right Arrow 68"/>
+          <p:cNvPr id="51" name="Right Arrow 50"/>
           <p:cNvSpPr/>
           <p:nvPr/>
         </p:nvSpPr>
         <p:spPr>
           <a:xfrm>
-            <a:off x="9555480" y="2286000"/>
-            <a:ext cx="411480" cy="164592"/>
+            <a:off x="9555480" y="2011680"/>
+            <a:ext cx="411480" cy="137160"/>
           </a:xfrm>
           <a:prstGeom prst="rightArrow">
             <a:avLst/>
@@ -6772,23 +5744,690 @@
           </a:p>
         </p:txBody>
       </p:sp>
+      <p:sp>
+        <p:nvSpPr>
+          <p:cNvPr id="52" name="Rounded Rectangle 51"/>
+          <p:cNvSpPr/>
+          <p:nvPr/>
+        </p:nvSpPr>
+        <p:spPr>
+          <a:xfrm>
+            <a:off x="9829800" y="3200400"/>
+            <a:ext cx="2148840" cy="640080"/>
+          </a:xfrm>
+          <a:prstGeom prst="roundRect">
+            <a:avLst/>
+          </a:prstGeom>
+          <a:solidFill>
+            <a:srgbClr val="F5F6F8"/>
+          </a:solidFill>
+          <a:ln w="12700">
+            <a:solidFill>
+              <a:srgbClr val="B0B8C5"/>
+            </a:solidFill>
+          </a:ln>
+        </p:spPr>
+        <p:style>
+          <a:lnRef idx="1">
+            <a:schemeClr val="accent1"/>
+          </a:lnRef>
+          <a:fillRef idx="3">
+            <a:schemeClr val="accent1"/>
+          </a:fillRef>
+          <a:effectRef idx="2">
+            <a:schemeClr val="accent1"/>
+          </a:effectRef>
+          <a:fontRef idx="minor">
+            <a:schemeClr val="lt1"/>
+          </a:fontRef>
+        </p:style>
+        <p:txBody>
+          <a:bodyPr rtlCol="0" anchor="ctr"/>
+          <a:lstStyle/>
+          <a:p>
+            <a:pPr algn="ctr"/>
+          </a:p>
+        </p:txBody>
+      </p:sp>
+      <p:sp>
+        <p:nvSpPr>
+          <p:cNvPr id="53" name="TextBox 52"/>
+          <p:cNvSpPr txBox="1"/>
+          <p:nvPr/>
+        </p:nvSpPr>
+        <p:spPr>
+          <a:xfrm>
+            <a:off x="9921240" y="3227832"/>
+            <a:ext cx="1920240" cy="164592"/>
+          </a:xfrm>
+          <a:prstGeom prst="rect">
+            <a:avLst/>
+          </a:prstGeom>
+          <a:noFill/>
+        </p:spPr>
+        <p:txBody>
+          <a:bodyPr wrap="square">
+            <a:spAutoFit/>
+          </a:bodyPr>
+          <a:lstStyle/>
+          <a:p>
+            <a:pPr algn="ctr">
+              <a:spcBef>
+                <a:spcPts val="0"/>
+              </a:spcBef>
+              <a:spcAft>
+                <a:spcPts val="0"/>
+              </a:spcAft>
+              <a:defRPr sz="800" b="1">
+                <a:solidFill>
+                  <a:srgbClr val="1B2A4A"/>
+                </a:solidFill>
+                <a:latin typeface="Segoe UI"/>
+              </a:defRPr>
+            </a:pPr>
+            <a:r>
+              <a:t>MVP Roadmap</a:t>
+            </a:r>
+          </a:p>
+        </p:txBody>
+      </p:sp>
+      <p:sp>
+        <p:nvSpPr>
+          <p:cNvPr id="54" name="Oval 53"/>
+          <p:cNvSpPr/>
+          <p:nvPr/>
+        </p:nvSpPr>
+        <p:spPr>
+          <a:xfrm>
+            <a:off x="10012680" y="3456432"/>
+            <a:ext cx="109728" cy="109728"/>
+          </a:xfrm>
+          <a:prstGeom prst="ellipse">
+            <a:avLst/>
+          </a:prstGeom>
+          <a:solidFill>
+            <a:srgbClr val="2E7D32"/>
+          </a:solidFill>
+          <a:ln>
+            <a:noFill/>
+          </a:ln>
+        </p:spPr>
+        <p:style>
+          <a:lnRef idx="1">
+            <a:schemeClr val="accent1"/>
+          </a:lnRef>
+          <a:fillRef idx="3">
+            <a:schemeClr val="accent1"/>
+          </a:fillRef>
+          <a:effectRef idx="2">
+            <a:schemeClr val="accent1"/>
+          </a:effectRef>
+          <a:fontRef idx="minor">
+            <a:schemeClr val="lt1"/>
+          </a:fontRef>
+        </p:style>
+        <p:txBody>
+          <a:bodyPr rtlCol="0" anchor="ctr"/>
+          <a:lstStyle/>
+          <a:p>
+            <a:pPr algn="ctr"/>
+          </a:p>
+        </p:txBody>
+      </p:sp>
+      <p:sp>
+        <p:nvSpPr>
+          <p:cNvPr id="55" name="TextBox 54"/>
+          <p:cNvSpPr txBox="1"/>
+          <p:nvPr/>
+        </p:nvSpPr>
+        <p:spPr>
+          <a:xfrm>
+            <a:off x="9939528" y="3584448"/>
+            <a:ext cx="502920" cy="164592"/>
+          </a:xfrm>
+          <a:prstGeom prst="rect">
+            <a:avLst/>
+          </a:prstGeom>
+          <a:noFill/>
+        </p:spPr>
+        <p:txBody>
+          <a:bodyPr wrap="square">
+            <a:spAutoFit/>
+          </a:bodyPr>
+          <a:lstStyle/>
+          <a:p>
+            <a:pPr algn="ctr">
+              <a:spcBef>
+                <a:spcPts val="0"/>
+              </a:spcBef>
+              <a:spcAft>
+                <a:spcPts val="0"/>
+              </a:spcAft>
+              <a:defRPr sz="500" b="1">
+                <a:solidFill>
+                  <a:srgbClr val="404A58"/>
+                </a:solidFill>
+                <a:latin typeface="Segoe UI"/>
+              </a:defRPr>
+            </a:pPr>
+            <a:r>
+              <a:t>Quality</a:t>
+            </a:r>
+          </a:p>
+        </p:txBody>
+      </p:sp>
+      <p:sp>
+        <p:nvSpPr>
+          <p:cNvPr id="56" name="Oval 55"/>
+          <p:cNvSpPr/>
+          <p:nvPr/>
+        </p:nvSpPr>
+        <p:spPr>
+          <a:xfrm>
+            <a:off x="10515600" y="3456432"/>
+            <a:ext cx="109728" cy="109728"/>
+          </a:xfrm>
+          <a:prstGeom prst="ellipse">
+            <a:avLst/>
+          </a:prstGeom>
+          <a:solidFill>
+            <a:srgbClr val="E65C00"/>
+          </a:solidFill>
+          <a:ln>
+            <a:noFill/>
+          </a:ln>
+        </p:spPr>
+        <p:style>
+          <a:lnRef idx="1">
+            <a:schemeClr val="accent1"/>
+          </a:lnRef>
+          <a:fillRef idx="3">
+            <a:schemeClr val="accent1"/>
+          </a:fillRef>
+          <a:effectRef idx="2">
+            <a:schemeClr val="accent1"/>
+          </a:effectRef>
+          <a:fontRef idx="minor">
+            <a:schemeClr val="lt1"/>
+          </a:fontRef>
+        </p:style>
+        <p:txBody>
+          <a:bodyPr rtlCol="0" anchor="ctr"/>
+          <a:lstStyle/>
+          <a:p>
+            <a:pPr algn="ctr"/>
+          </a:p>
+        </p:txBody>
+      </p:sp>
+      <p:sp>
+        <p:nvSpPr>
+          <p:cNvPr id="57" name="TextBox 56"/>
+          <p:cNvSpPr txBox="1"/>
+          <p:nvPr/>
+        </p:nvSpPr>
+        <p:spPr>
+          <a:xfrm>
+            <a:off x="10442448" y="3584448"/>
+            <a:ext cx="502920" cy="164592"/>
+          </a:xfrm>
+          <a:prstGeom prst="rect">
+            <a:avLst/>
+          </a:prstGeom>
+          <a:noFill/>
+        </p:spPr>
+        <p:txBody>
+          <a:bodyPr wrap="square">
+            <a:spAutoFit/>
+          </a:bodyPr>
+          <a:lstStyle/>
+          <a:p>
+            <a:pPr algn="ctr">
+              <a:spcBef>
+                <a:spcPts val="0"/>
+              </a:spcBef>
+              <a:spcAft>
+                <a:spcPts val="0"/>
+              </a:spcAft>
+              <a:defRPr sz="500" b="1">
+                <a:solidFill>
+                  <a:srgbClr val="404A58"/>
+                </a:solidFill>
+                <a:latin typeface="Segoe UI"/>
+              </a:defRPr>
+            </a:pPr>
+            <a:r>
+              <a:t>Dedup</a:t>
+            </a:r>
+          </a:p>
+        </p:txBody>
+      </p:sp>
+      <p:sp>
+        <p:nvSpPr>
+          <p:cNvPr id="58" name="Oval 57"/>
+          <p:cNvSpPr/>
+          <p:nvPr/>
+        </p:nvSpPr>
+        <p:spPr>
+          <a:xfrm>
+            <a:off x="11018520" y="3456432"/>
+            <a:ext cx="109728" cy="109728"/>
+          </a:xfrm>
+          <a:prstGeom prst="ellipse">
+            <a:avLst/>
+          </a:prstGeom>
+          <a:solidFill>
+            <a:srgbClr val="1565C0"/>
+          </a:solidFill>
+          <a:ln>
+            <a:noFill/>
+          </a:ln>
+        </p:spPr>
+        <p:style>
+          <a:lnRef idx="1">
+            <a:schemeClr val="accent1"/>
+          </a:lnRef>
+          <a:fillRef idx="3">
+            <a:schemeClr val="accent1"/>
+          </a:fillRef>
+          <a:effectRef idx="2">
+            <a:schemeClr val="accent1"/>
+          </a:effectRef>
+          <a:fontRef idx="minor">
+            <a:schemeClr val="lt1"/>
+          </a:fontRef>
+        </p:style>
+        <p:txBody>
+          <a:bodyPr rtlCol="0" anchor="ctr"/>
+          <a:lstStyle/>
+          <a:p>
+            <a:pPr algn="ctr"/>
+          </a:p>
+        </p:txBody>
+      </p:sp>
+      <p:sp>
+        <p:nvSpPr>
+          <p:cNvPr id="59" name="TextBox 58"/>
+          <p:cNvSpPr txBox="1"/>
+          <p:nvPr/>
+        </p:nvSpPr>
+        <p:spPr>
+          <a:xfrm>
+            <a:off x="10945368" y="3584448"/>
+            <a:ext cx="502920" cy="164592"/>
+          </a:xfrm>
+          <a:prstGeom prst="rect">
+            <a:avLst/>
+          </a:prstGeom>
+          <a:noFill/>
+        </p:spPr>
+        <p:txBody>
+          <a:bodyPr wrap="square">
+            <a:spAutoFit/>
+          </a:bodyPr>
+          <a:lstStyle/>
+          <a:p>
+            <a:pPr algn="ctr">
+              <a:spcBef>
+                <a:spcPts val="0"/>
+              </a:spcBef>
+              <a:spcAft>
+                <a:spcPts val="0"/>
+              </a:spcAft>
+              <a:defRPr sz="500" b="1">
+                <a:solidFill>
+                  <a:srgbClr val="404A58"/>
+                </a:solidFill>
+                <a:latin typeface="Segoe UI"/>
+              </a:defRPr>
+            </a:pPr>
+            <a:r>
+              <a:t>Classify</a:t>
+            </a:r>
+          </a:p>
+        </p:txBody>
+      </p:sp>
+      <p:sp>
+        <p:nvSpPr>
+          <p:cNvPr id="60" name="Oval 59"/>
+          <p:cNvSpPr/>
+          <p:nvPr/>
+        </p:nvSpPr>
+        <p:spPr>
+          <a:xfrm>
+            <a:off x="11521440" y="3456432"/>
+            <a:ext cx="109728" cy="109728"/>
+          </a:xfrm>
+          <a:prstGeom prst="ellipse">
+            <a:avLst/>
+          </a:prstGeom>
+          <a:solidFill>
+            <a:srgbClr val="7B1FA2"/>
+          </a:solidFill>
+          <a:ln>
+            <a:noFill/>
+          </a:ln>
+        </p:spPr>
+        <p:style>
+          <a:lnRef idx="1">
+            <a:schemeClr val="accent1"/>
+          </a:lnRef>
+          <a:fillRef idx="3">
+            <a:schemeClr val="accent1"/>
+          </a:fillRef>
+          <a:effectRef idx="2">
+            <a:schemeClr val="accent1"/>
+          </a:effectRef>
+          <a:fontRef idx="minor">
+            <a:schemeClr val="lt1"/>
+          </a:fontRef>
+        </p:style>
+        <p:txBody>
+          <a:bodyPr rtlCol="0" anchor="ctr"/>
+          <a:lstStyle/>
+          <a:p>
+            <a:pPr algn="ctr"/>
+          </a:p>
+        </p:txBody>
+      </p:sp>
+      <p:sp>
+        <p:nvSpPr>
+          <p:cNvPr id="61" name="TextBox 60"/>
+          <p:cNvSpPr txBox="1"/>
+          <p:nvPr/>
+        </p:nvSpPr>
+        <p:spPr>
+          <a:xfrm>
+            <a:off x="11448288" y="3584448"/>
+            <a:ext cx="502920" cy="164592"/>
+          </a:xfrm>
+          <a:prstGeom prst="rect">
+            <a:avLst/>
+          </a:prstGeom>
+          <a:noFill/>
+        </p:spPr>
+        <p:txBody>
+          <a:bodyPr wrap="square">
+            <a:spAutoFit/>
+          </a:bodyPr>
+          <a:lstStyle/>
+          <a:p>
+            <a:pPr algn="ctr">
+              <a:spcBef>
+                <a:spcPts val="0"/>
+              </a:spcBef>
+              <a:spcAft>
+                <a:spcPts val="0"/>
+              </a:spcAft>
+              <a:defRPr sz="500" b="1">
+                <a:solidFill>
+                  <a:srgbClr val="404A58"/>
+                </a:solidFill>
+                <a:latin typeface="Segoe UI"/>
+              </a:defRPr>
+            </a:pPr>
+            <a:r>
+              <a:t>Artifacts</a:t>
+            </a:r>
+          </a:p>
+        </p:txBody>
+      </p:sp>
+      <p:sp>
+        <p:nvSpPr>
+          <p:cNvPr id="62" name="Rounded Rectangle 61"/>
+          <p:cNvSpPr/>
+          <p:nvPr/>
+        </p:nvSpPr>
+        <p:spPr>
+          <a:xfrm>
+            <a:off x="137160" y="4663440"/>
+            <a:ext cx="3291840" cy="1920240"/>
+          </a:xfrm>
+          <a:prstGeom prst="roundRect">
+            <a:avLst/>
+          </a:prstGeom>
+          <a:solidFill>
+            <a:srgbClr val="F5F6F8"/>
+          </a:solidFill>
+          <a:ln w="19050">
+            <a:solidFill>
+              <a:srgbClr val="00684A"/>
+            </a:solidFill>
+          </a:ln>
+        </p:spPr>
+        <p:style>
+          <a:lnRef idx="1">
+            <a:schemeClr val="accent1"/>
+          </a:lnRef>
+          <a:fillRef idx="3">
+            <a:schemeClr val="accent1"/>
+          </a:fillRef>
+          <a:effectRef idx="2">
+            <a:schemeClr val="accent1"/>
+          </a:effectRef>
+          <a:fontRef idx="minor">
+            <a:schemeClr val="lt1"/>
+          </a:fontRef>
+        </p:style>
+        <p:txBody>
+          <a:bodyPr rtlCol="0" anchor="ctr"/>
+          <a:lstStyle/>
+          <a:p>
+            <a:pPr algn="ctr"/>
+          </a:p>
+        </p:txBody>
+      </p:sp>
+      <p:sp>
+        <p:nvSpPr>
+          <p:cNvPr id="63" name="TextBox 62"/>
+          <p:cNvSpPr txBox="1"/>
+          <p:nvPr/>
+        </p:nvSpPr>
+        <p:spPr>
+          <a:xfrm>
+            <a:off x="228600" y="4736592"/>
+            <a:ext cx="3108960" cy="228600"/>
+          </a:xfrm>
+          <a:prstGeom prst="rect">
+            <a:avLst/>
+          </a:prstGeom>
+          <a:noFill/>
+        </p:spPr>
+        <p:txBody>
+          <a:bodyPr wrap="square">
+            <a:spAutoFit/>
+          </a:bodyPr>
+          <a:lstStyle/>
+          <a:p>
+            <a:pPr algn="l">
+              <a:spcBef>
+                <a:spcPts val="0"/>
+              </a:spcBef>
+              <a:spcAft>
+                <a:spcPts val="0"/>
+              </a:spcAft>
+              <a:defRPr sz="1200" b="1">
+                <a:solidFill>
+                  <a:srgbClr val="00684A"/>
+                </a:solidFill>
+                <a:latin typeface="Segoe UI"/>
+              </a:defRPr>
+            </a:pPr>
+            <a:r>
+              <a:t>MongoDB</a:t>
+            </a:r>
+          </a:p>
+        </p:txBody>
+      </p:sp>
+      <p:sp>
+        <p:nvSpPr>
+          <p:cNvPr id="64" name="TextBox 63"/>
+          <p:cNvSpPr txBox="1"/>
+          <p:nvPr/>
+        </p:nvSpPr>
+        <p:spPr>
+          <a:xfrm>
+            <a:off x="228600" y="5029200"/>
+            <a:ext cx="3108960" cy="1371600"/>
+          </a:xfrm>
+          <a:prstGeom prst="rect">
+            <a:avLst/>
+          </a:prstGeom>
+          <a:noFill/>
+        </p:spPr>
+        <p:txBody>
+          <a:bodyPr wrap="square">
+            <a:spAutoFit/>
+          </a:bodyPr>
+          <a:lstStyle/>
+          <a:p>
+            <a:pPr algn="l">
+              <a:spcBef>
+                <a:spcPts val="0"/>
+              </a:spcBef>
+              <a:spcAft>
+                <a:spcPts val="0"/>
+              </a:spcAft>
+              <a:defRPr sz="700" b="1">
+                <a:solidFill>
+                  <a:srgbClr val="404A58"/>
+                </a:solidFill>
+                <a:latin typeface="Segoe UI"/>
+              </a:defRPr>
+            </a:pPr>
+            <a:r>
+              <a:t>YAML Configs (imported at startup)</a:t>
+            </a:r>
+          </a:p>
+          <a:p>
+            <a:pPr algn="l">
+              <a:spcBef>
+                <a:spcPts val="0"/>
+              </a:spcBef>
+              <a:spcAft>
+                <a:spcPts val="0"/>
+              </a:spcAft>
+              <a:defRPr sz="700" b="1">
+                <a:solidFill>
+                  <a:srgbClr val="404A58"/>
+                </a:solidFill>
+                <a:latin typeface="Segoe UI"/>
+              </a:defRPr>
+            </a:pPr>
+            <a:r>
+              <a:t>Session Storage &amp; State</a:t>
+            </a:r>
+          </a:p>
+          <a:p>
+            <a:pPr algn="l">
+              <a:spcBef>
+                <a:spcPts val="0"/>
+              </a:spcBef>
+              <a:spcAft>
+                <a:spcPts val="0"/>
+              </a:spcAft>
+              <a:defRPr sz="700" b="1">
+                <a:solidFill>
+                  <a:srgbClr val="404A58"/>
+                </a:solidFill>
+                <a:latin typeface="Segoe UI"/>
+              </a:defRPr>
+            </a:pPr>
+            <a:r>
+              <a:t>Intake Answers</a:t>
+            </a:r>
+          </a:p>
+          <a:p>
+            <a:pPr algn="l">
+              <a:spcBef>
+                <a:spcPts val="0"/>
+              </a:spcBef>
+              <a:spcAft>
+                <a:spcPts val="0"/>
+              </a:spcAft>
+              <a:defRPr sz="700" b="1">
+                <a:solidFill>
+                  <a:srgbClr val="404A58"/>
+                </a:solidFill>
+                <a:latin typeface="Segoe UI"/>
+              </a:defRPr>
+            </a:pPr>
+            <a:r>
+              <a:t>Conversation History</a:t>
+            </a:r>
+          </a:p>
+          <a:p>
+            <a:pPr algn="l">
+              <a:spcBef>
+                <a:spcPts val="0"/>
+              </a:spcBef>
+              <a:spcAft>
+                <a:spcPts val="0"/>
+              </a:spcAft>
+              <a:defRPr sz="700" b="0">
+                <a:solidFill>
+                  <a:srgbClr val="404A58"/>
+                </a:solidFill>
+                <a:latin typeface="Segoe UI"/>
+              </a:defRPr>
+            </a:pPr>
+          </a:p>
+          <a:p>
+            <a:pPr algn="l">
+              <a:spcBef>
+                <a:spcPts val="0"/>
+              </a:spcBef>
+              <a:spcAft>
+                <a:spcPts val="0"/>
+              </a:spcAft>
+              <a:defRPr sz="700" b="0">
+                <a:solidFill>
+                  <a:srgbClr val="404A58"/>
+                </a:solidFill>
+                <a:latin typeface="Segoe UI"/>
+              </a:defRPr>
+            </a:pPr>
+            <a:r>
+              <a:t>YAML files are the authoring format.</a:t>
+            </a:r>
+          </a:p>
+          <a:p>
+            <a:pPr algn="l">
+              <a:spcBef>
+                <a:spcPts val="0"/>
+              </a:spcBef>
+              <a:spcAft>
+                <a:spcPts val="0"/>
+              </a:spcAft>
+              <a:defRPr sz="700" b="0">
+                <a:solidFill>
+                  <a:srgbClr val="404A58"/>
+                </a:solidFill>
+                <a:latin typeface="Segoe UI"/>
+              </a:defRPr>
+            </a:pPr>
+            <a:r>
+              <a:t>Imported into MongoDB at startup.</a:t>
+            </a:r>
+          </a:p>
+        </p:txBody>
+      </p:sp>
       <p:cxnSp>
         <p:nvCxnSpPr>
-          <p:cNvPr id="70" name="Connector 69"/>
+          <p:cNvPr id="65" name="Connector 64"/>
           <p:cNvCxnSpPr/>
           <p:nvPr/>
         </p:nvCxnSpPr>
         <p:spPr>
-          <a:xfrm>
-            <a:off x="9601200" y="2468880"/>
-            <a:ext cx="228600" cy="0"/>
+          <a:xfrm flipV="1">
+            <a:off x="3063240" y="4343400"/>
+            <a:ext cx="0" cy="320040"/>
           </a:xfrm>
           <a:prstGeom prst="line">
             <a:avLst/>
           </a:prstGeom>
-          <a:ln w="19050">
+          <a:ln w="25400">
             <a:solidFill>
-              <a:srgbClr val="B0B8C5"/>
+              <a:srgbClr val="00684A"/>
             </a:solidFill>
             <a:prstDash val="sysDash"/>
           </a:ln>
@@ -6810,24 +6449,24 @@
       </p:cxnSp>
       <p:sp>
         <p:nvSpPr>
-          <p:cNvPr id="71" name="Rounded Rectangle 70"/>
+          <p:cNvPr id="66" name="Rounded Rectangle 65"/>
           <p:cNvSpPr/>
           <p:nvPr/>
         </p:nvSpPr>
         <p:spPr>
           <a:xfrm>
-            <a:off x="9829800" y="3474720"/>
-            <a:ext cx="2148840" cy="502920"/>
+            <a:off x="3566160" y="4663440"/>
+            <a:ext cx="3474720" cy="1920240"/>
           </a:xfrm>
           <a:prstGeom prst="roundRect">
             <a:avLst/>
           </a:prstGeom>
           <a:solidFill>
-            <a:srgbClr val="F0F2F5"/>
+            <a:srgbClr val="F5F6F8"/>
           </a:solidFill>
-          <a:ln w="12700">
+          <a:ln w="19050">
             <a:solidFill>
-              <a:srgbClr val="B0B8C5"/>
+              <a:srgbClr val="D4A843"/>
             </a:solidFill>
           </a:ln>
         </p:spPr>
@@ -6846,11 +6485,43 @@
           </a:fontRef>
         </p:style>
         <p:txBody>
-          <a:bodyPr rtlCol="0" anchor="ctr" wrap="square"/>
+          <a:bodyPr rtlCol="0" anchor="ctr"/>
+          <a:lstStyle/>
+          <a:p>
+            <a:pPr algn="ctr"/>
+          </a:p>
+        </p:txBody>
+      </p:sp>
+      <p:sp>
+        <p:nvSpPr>
+          <p:cNvPr id="67" name="TextBox 66"/>
+          <p:cNvSpPr txBox="1"/>
+          <p:nvPr/>
+        </p:nvSpPr>
+        <p:spPr>
+          <a:xfrm>
+            <a:off x="3657600" y="4736592"/>
+            <a:ext cx="3291840" cy="228600"/>
+          </a:xfrm>
+          <a:prstGeom prst="rect">
+            <a:avLst/>
+          </a:prstGeom>
+          <a:noFill/>
+        </p:spPr>
+        <p:txBody>
+          <a:bodyPr wrap="square">
+            <a:spAutoFit/>
+          </a:bodyPr>
           <a:lstStyle/>
           <a:p>
             <a:pPr algn="l">
-              <a:defRPr sz="700" b="1">
+              <a:spcBef>
+                <a:spcPts val="0"/>
+              </a:spcBef>
+              <a:spcAft>
+                <a:spcPts val="0"/>
+              </a:spcAft>
+              <a:defRPr sz="1100" b="1">
                 <a:solidFill>
                   <a:srgbClr val="1B2A4A"/>
                 </a:solidFill>
@@ -6858,29 +6529,21 @@
               </a:defRPr>
             </a:pPr>
             <a:r>
-              <a:t>5. Aggregated answers</a:t>
-            </a:r>
-            <a:br/>
-            <a:r>
-              <a:t>    submitted to platform via</a:t>
-            </a:r>
-            <a:br/>
-            <a:r>
-              <a:t>    adapter (or StoryDev in MVP4)</a:t>
-            </a:r>
-          </a:p>
-        </p:txBody>
-      </p:sp>
-      <p:sp>
-        <p:nvSpPr>
-          <p:cNvPr id="72" name="Rounded Rectangle 71"/>
+              <a:t>Google Gemini 2.0 Flash (LLM)</a:t>
+            </a:r>
+          </a:p>
+        </p:txBody>
+      </p:sp>
+      <p:sp>
+        <p:nvSpPr>
+          <p:cNvPr id="68" name="Rounded Rectangle 67"/>
           <p:cNvSpPr/>
           <p:nvPr/>
         </p:nvSpPr>
         <p:spPr>
           <a:xfrm>
-            <a:off x="9829800" y="4114800"/>
-            <a:ext cx="2148840" cy="640080"/>
+            <a:off x="3657600" y="5074920"/>
+            <a:ext cx="1554480" cy="457200"/>
           </a:xfrm>
           <a:prstGeom prst="roundRect">
             <a:avLst/>
@@ -6909,411 +6572,47 @@
           </a:fontRef>
         </p:style>
         <p:txBody>
-          <a:bodyPr rtlCol="0" anchor="ctr"/>
-          <a:lstStyle/>
-          <a:p>
-            <a:pPr algn="ctr"/>
-          </a:p>
-        </p:txBody>
-      </p:sp>
-      <p:sp>
-        <p:nvSpPr>
-          <p:cNvPr id="73" name="TextBox 72"/>
-          <p:cNvSpPr txBox="1"/>
-          <p:nvPr/>
-        </p:nvSpPr>
-        <p:spPr>
-          <a:xfrm>
-            <a:off x="9921240" y="4133087"/>
-            <a:ext cx="1920240" cy="182880"/>
-          </a:xfrm>
-          <a:prstGeom prst="rect">
-            <a:avLst/>
-          </a:prstGeom>
-          <a:noFill/>
-        </p:spPr>
-        <p:txBody>
-          <a:bodyPr wrap="square">
-            <a:spAutoFit/>
-          </a:bodyPr>
+          <a:bodyPr rtlCol="0" anchor="ctr" wrap="square"/>
           <a:lstStyle/>
           <a:p>
             <a:pPr algn="ctr">
-              <a:spcBef>
-                <a:spcPts val="0"/>
-              </a:spcBef>
-              <a:spcAft>
-                <a:spcPts val="0"/>
-              </a:spcAft>
-              <a:defRPr sz="800" b="1">
-                <a:solidFill>
-                  <a:srgbClr val="1B2A4A"/>
+              <a:defRPr sz="700" b="1">
+                <a:solidFill>
+                  <a:srgbClr val="404A58"/>
                 </a:solidFill>
                 <a:latin typeface="Segoe UI"/>
               </a:defRPr>
             </a:pPr>
             <a:r>
-              <a:t>MVP Roadmap</a:t>
-            </a:r>
-          </a:p>
-        </p:txBody>
-      </p:sp>
-      <p:sp>
-        <p:nvSpPr>
-          <p:cNvPr id="74" name="Oval 73"/>
+              <a:t>Agent LLM Calls</a:t>
+            </a:r>
+            <a:br/>
+            <a:r>
+              <a:t>(reasoning, validation,</a:t>
+            </a:r>
+            <a:br/>
+            <a:r>
+              <a:t>classification, assist)</a:t>
+            </a:r>
+          </a:p>
+        </p:txBody>
+      </p:sp>
+      <p:sp>
+        <p:nvSpPr>
+          <p:cNvPr id="69" name="Rounded Rectangle 68"/>
           <p:cNvSpPr/>
           <p:nvPr/>
         </p:nvSpPr>
         <p:spPr>
           <a:xfrm>
-            <a:off x="10012680" y="4370832"/>
-            <a:ext cx="109728" cy="109728"/>
-          </a:xfrm>
-          <a:prstGeom prst="ellipse">
+            <a:off x="5394960" y="5074920"/>
+            <a:ext cx="1554480" cy="457200"/>
+          </a:xfrm>
+          <a:prstGeom prst="roundRect">
             <a:avLst/>
           </a:prstGeom>
           <a:solidFill>
-            <a:srgbClr val="2E7D32"/>
-          </a:solidFill>
-          <a:ln>
-            <a:noFill/>
-          </a:ln>
-        </p:spPr>
-        <p:style>
-          <a:lnRef idx="1">
-            <a:schemeClr val="accent1"/>
-          </a:lnRef>
-          <a:fillRef idx="3">
-            <a:schemeClr val="accent1"/>
-          </a:fillRef>
-          <a:effectRef idx="2">
-            <a:schemeClr val="accent1"/>
-          </a:effectRef>
-          <a:fontRef idx="minor">
-            <a:schemeClr val="lt1"/>
-          </a:fontRef>
-        </p:style>
-        <p:txBody>
-          <a:bodyPr rtlCol="0" anchor="ctr"/>
-          <a:lstStyle/>
-          <a:p>
-            <a:pPr algn="ctr"/>
-          </a:p>
-        </p:txBody>
-      </p:sp>
-      <p:sp>
-        <p:nvSpPr>
-          <p:cNvPr id="75" name="TextBox 74"/>
-          <p:cNvSpPr txBox="1"/>
-          <p:nvPr/>
-        </p:nvSpPr>
-        <p:spPr>
-          <a:xfrm>
-            <a:off x="9939528" y="4498848"/>
-            <a:ext cx="502920" cy="164592"/>
-          </a:xfrm>
-          <a:prstGeom prst="rect">
-            <a:avLst/>
-          </a:prstGeom>
-          <a:noFill/>
-        </p:spPr>
-        <p:txBody>
-          <a:bodyPr wrap="square">
-            <a:spAutoFit/>
-          </a:bodyPr>
-          <a:lstStyle/>
-          <a:p>
-            <a:pPr algn="ctr">
-              <a:spcBef>
-                <a:spcPts val="0"/>
-              </a:spcBef>
-              <a:spcAft>
-                <a:spcPts val="0"/>
-              </a:spcAft>
-              <a:defRPr sz="500" b="1">
-                <a:solidFill>
-                  <a:srgbClr val="404A58"/>
-                </a:solidFill>
-                <a:latin typeface="Segoe UI"/>
-              </a:defRPr>
-            </a:pPr>
-            <a:r>
-              <a:t>Quality</a:t>
-            </a:r>
-          </a:p>
-        </p:txBody>
-      </p:sp>
-      <p:sp>
-        <p:nvSpPr>
-          <p:cNvPr id="76" name="Oval 75"/>
-          <p:cNvSpPr/>
-          <p:nvPr/>
-        </p:nvSpPr>
-        <p:spPr>
-          <a:xfrm>
-            <a:off x="10515600" y="4370832"/>
-            <a:ext cx="109728" cy="109728"/>
-          </a:xfrm>
-          <a:prstGeom prst="ellipse">
-            <a:avLst/>
-          </a:prstGeom>
-          <a:solidFill>
-            <a:srgbClr val="E65C00"/>
-          </a:solidFill>
-          <a:ln>
-            <a:noFill/>
-          </a:ln>
-        </p:spPr>
-        <p:style>
-          <a:lnRef idx="1">
-            <a:schemeClr val="accent1"/>
-          </a:lnRef>
-          <a:fillRef idx="3">
-            <a:schemeClr val="accent1"/>
-          </a:fillRef>
-          <a:effectRef idx="2">
-            <a:schemeClr val="accent1"/>
-          </a:effectRef>
-          <a:fontRef idx="minor">
-            <a:schemeClr val="lt1"/>
-          </a:fontRef>
-        </p:style>
-        <p:txBody>
-          <a:bodyPr rtlCol="0" anchor="ctr"/>
-          <a:lstStyle/>
-          <a:p>
-            <a:pPr algn="ctr"/>
-          </a:p>
-        </p:txBody>
-      </p:sp>
-      <p:sp>
-        <p:nvSpPr>
-          <p:cNvPr id="77" name="TextBox 76"/>
-          <p:cNvSpPr txBox="1"/>
-          <p:nvPr/>
-        </p:nvSpPr>
-        <p:spPr>
-          <a:xfrm>
-            <a:off x="10442448" y="4498848"/>
-            <a:ext cx="502920" cy="164592"/>
-          </a:xfrm>
-          <a:prstGeom prst="rect">
-            <a:avLst/>
-          </a:prstGeom>
-          <a:noFill/>
-        </p:spPr>
-        <p:txBody>
-          <a:bodyPr wrap="square">
-            <a:spAutoFit/>
-          </a:bodyPr>
-          <a:lstStyle/>
-          <a:p>
-            <a:pPr algn="ctr">
-              <a:spcBef>
-                <a:spcPts val="0"/>
-              </a:spcBef>
-              <a:spcAft>
-                <a:spcPts val="0"/>
-              </a:spcAft>
-              <a:defRPr sz="500" b="1">
-                <a:solidFill>
-                  <a:srgbClr val="404A58"/>
-                </a:solidFill>
-                <a:latin typeface="Segoe UI"/>
-              </a:defRPr>
-            </a:pPr>
-            <a:r>
-              <a:t>Dedup</a:t>
-            </a:r>
-          </a:p>
-        </p:txBody>
-      </p:sp>
-      <p:sp>
-        <p:nvSpPr>
-          <p:cNvPr id="78" name="Oval 77"/>
-          <p:cNvSpPr/>
-          <p:nvPr/>
-        </p:nvSpPr>
-        <p:spPr>
-          <a:xfrm>
-            <a:off x="11018520" y="4370832"/>
-            <a:ext cx="109728" cy="109728"/>
-          </a:xfrm>
-          <a:prstGeom prst="ellipse">
-            <a:avLst/>
-          </a:prstGeom>
-          <a:solidFill>
-            <a:srgbClr val="1565C0"/>
-          </a:solidFill>
-          <a:ln>
-            <a:noFill/>
-          </a:ln>
-        </p:spPr>
-        <p:style>
-          <a:lnRef idx="1">
-            <a:schemeClr val="accent1"/>
-          </a:lnRef>
-          <a:fillRef idx="3">
-            <a:schemeClr val="accent1"/>
-          </a:fillRef>
-          <a:effectRef idx="2">
-            <a:schemeClr val="accent1"/>
-          </a:effectRef>
-          <a:fontRef idx="minor">
-            <a:schemeClr val="lt1"/>
-          </a:fontRef>
-        </p:style>
-        <p:txBody>
-          <a:bodyPr rtlCol="0" anchor="ctr"/>
-          <a:lstStyle/>
-          <a:p>
-            <a:pPr algn="ctr"/>
-          </a:p>
-        </p:txBody>
-      </p:sp>
-      <p:sp>
-        <p:nvSpPr>
-          <p:cNvPr id="79" name="TextBox 78"/>
-          <p:cNvSpPr txBox="1"/>
-          <p:nvPr/>
-        </p:nvSpPr>
-        <p:spPr>
-          <a:xfrm>
-            <a:off x="10945368" y="4498848"/>
-            <a:ext cx="502920" cy="164592"/>
-          </a:xfrm>
-          <a:prstGeom prst="rect">
-            <a:avLst/>
-          </a:prstGeom>
-          <a:noFill/>
-        </p:spPr>
-        <p:txBody>
-          <a:bodyPr wrap="square">
-            <a:spAutoFit/>
-          </a:bodyPr>
-          <a:lstStyle/>
-          <a:p>
-            <a:pPr algn="ctr">
-              <a:spcBef>
-                <a:spcPts val="0"/>
-              </a:spcBef>
-              <a:spcAft>
-                <a:spcPts val="0"/>
-              </a:spcAft>
-              <a:defRPr sz="500" b="1">
-                <a:solidFill>
-                  <a:srgbClr val="404A58"/>
-                </a:solidFill>
-                <a:latin typeface="Segoe UI"/>
-              </a:defRPr>
-            </a:pPr>
-            <a:r>
-              <a:t>Classify</a:t>
-            </a:r>
-          </a:p>
-        </p:txBody>
-      </p:sp>
-      <p:sp>
-        <p:nvSpPr>
-          <p:cNvPr id="80" name="Oval 79"/>
-          <p:cNvSpPr/>
-          <p:nvPr/>
-        </p:nvSpPr>
-        <p:spPr>
-          <a:xfrm>
-            <a:off x="11521440" y="4370832"/>
-            <a:ext cx="109728" cy="109728"/>
-          </a:xfrm>
-          <a:prstGeom prst="ellipse">
-            <a:avLst/>
-          </a:prstGeom>
-          <a:solidFill>
-            <a:srgbClr val="7B1FA2"/>
-          </a:solidFill>
-          <a:ln>
-            <a:noFill/>
-          </a:ln>
-        </p:spPr>
-        <p:style>
-          <a:lnRef idx="1">
-            <a:schemeClr val="accent1"/>
-          </a:lnRef>
-          <a:fillRef idx="3">
-            <a:schemeClr val="accent1"/>
-          </a:fillRef>
-          <a:effectRef idx="2">
-            <a:schemeClr val="accent1"/>
-          </a:effectRef>
-          <a:fontRef idx="minor">
-            <a:schemeClr val="lt1"/>
-          </a:fontRef>
-        </p:style>
-        <p:txBody>
-          <a:bodyPr rtlCol="0" anchor="ctr"/>
-          <a:lstStyle/>
-          <a:p>
-            <a:pPr algn="ctr"/>
-          </a:p>
-        </p:txBody>
-      </p:sp>
-      <p:sp>
-        <p:nvSpPr>
-          <p:cNvPr id="81" name="TextBox 80"/>
-          <p:cNvSpPr txBox="1"/>
-          <p:nvPr/>
-        </p:nvSpPr>
-        <p:spPr>
-          <a:xfrm>
-            <a:off x="11448288" y="4498848"/>
-            <a:ext cx="502920" cy="164592"/>
-          </a:xfrm>
-          <a:prstGeom prst="rect">
-            <a:avLst/>
-          </a:prstGeom>
-          <a:noFill/>
-        </p:spPr>
-        <p:txBody>
-          <a:bodyPr wrap="square">
-            <a:spAutoFit/>
-          </a:bodyPr>
-          <a:lstStyle/>
-          <a:p>
-            <a:pPr algn="ctr">
-              <a:spcBef>
-                <a:spcPts val="0"/>
-              </a:spcBef>
-              <a:spcAft>
-                <a:spcPts val="0"/>
-              </a:spcAft>
-              <a:defRPr sz="500" b="1">
-                <a:solidFill>
-                  <a:srgbClr val="404A58"/>
-                </a:solidFill>
-                <a:latin typeface="Segoe UI"/>
-              </a:defRPr>
-            </a:pPr>
-            <a:r>
-              <a:t>Artifacts</a:t>
-            </a:r>
-          </a:p>
-        </p:txBody>
-      </p:sp>
-      <p:sp>
-        <p:nvSpPr>
-          <p:cNvPr id="82" name="Rounded Rectangle 81"/>
-          <p:cNvSpPr/>
-          <p:nvPr/>
-        </p:nvSpPr>
-        <p:spPr>
-          <a:xfrm>
-            <a:off x="137160" y="4709160"/>
-            <a:ext cx="2103120" cy="320040"/>
-          </a:xfrm>
-          <a:prstGeom prst="roundRect">
-            <a:avLst/>
-          </a:prstGeom>
-          <a:solidFill>
-            <a:srgbClr val="F0F2F5"/>
+            <a:srgbClr val="FFFFFF"/>
           </a:solidFill>
           <a:ln w="12700">
             <a:solidFill>
@@ -7336,1428 +6635,48 @@
           </a:fontRef>
         </p:style>
         <p:txBody>
-          <a:bodyPr rtlCol="0" anchor="ctr"/>
-          <a:lstStyle/>
-          <a:p>
-            <a:pPr algn="ctr"/>
-          </a:p>
-        </p:txBody>
-      </p:sp>
-      <p:sp>
-        <p:nvSpPr>
-          <p:cNvPr id="83" name="TextBox 82"/>
-          <p:cNvSpPr txBox="1"/>
-          <p:nvPr/>
-        </p:nvSpPr>
-        <p:spPr>
-          <a:xfrm>
-            <a:off x="182880" y="4727448"/>
-            <a:ext cx="2011680" cy="274320"/>
-          </a:xfrm>
-          <a:prstGeom prst="rect">
-            <a:avLst/>
-          </a:prstGeom>
-          <a:noFill/>
-        </p:spPr>
-        <p:txBody>
-          <a:bodyPr wrap="square">
-            <a:spAutoFit/>
-          </a:bodyPr>
-          <a:lstStyle/>
-          <a:p>
-            <a:pPr algn="l">
-              <a:spcBef>
-                <a:spcPts val="0"/>
-              </a:spcBef>
-              <a:spcAft>
-                <a:spcPts val="0"/>
-              </a:spcAft>
-              <a:defRPr sz="600" b="1">
-                <a:solidFill>
-                  <a:srgbClr val="1B2A4A"/>
+          <a:bodyPr rtlCol="0" anchor="ctr" wrap="square"/>
+          <a:lstStyle/>
+          <a:p>
+            <a:pPr algn="ctr">
+              <a:defRPr sz="700" b="1">
+                <a:solidFill>
+                  <a:srgbClr val="404A58"/>
                 </a:solidFill>
                 <a:latin typeface="Segoe UI"/>
               </a:defRPr>
             </a:pPr>
             <a:r>
-              <a:t>Configs + sessions + state</a:t>
+              <a:t>ADK Runner</a:t>
             </a:r>
             <a:br/>
             <a:r>
-              <a:t>persisted in MongoDB</a:t>
-            </a:r>
-          </a:p>
-        </p:txBody>
-      </p:sp>
-      <p:sp>
-        <p:nvSpPr>
-          <p:cNvPr id="84" name="Rounded Rectangle 83"/>
-          <p:cNvSpPr/>
-          <p:nvPr/>
-        </p:nvSpPr>
-        <p:spPr>
-          <a:xfrm>
-            <a:off x="2423160" y="4709160"/>
-            <a:ext cx="1828800" cy="320040"/>
-          </a:xfrm>
-          <a:prstGeom prst="roundRect">
-            <a:avLst/>
-          </a:prstGeom>
-          <a:solidFill>
-            <a:srgbClr val="F0F2F5"/>
-          </a:solidFill>
-          <a:ln w="12700">
-            <a:solidFill>
-              <a:srgbClr val="B0B8C5"/>
-            </a:solidFill>
-          </a:ln>
-        </p:spPr>
-        <p:style>
-          <a:lnRef idx="1">
-            <a:schemeClr val="accent1"/>
-          </a:lnRef>
-          <a:fillRef idx="3">
-            <a:schemeClr val="accent1"/>
-          </a:fillRef>
-          <a:effectRef idx="2">
-            <a:schemeClr val="accent1"/>
-          </a:effectRef>
-          <a:fontRef idx="minor">
-            <a:schemeClr val="lt1"/>
-          </a:fontRef>
-        </p:style>
-        <p:txBody>
-          <a:bodyPr rtlCol="0" anchor="ctr"/>
-          <a:lstStyle/>
-          <a:p>
-            <a:pPr algn="ctr"/>
-          </a:p>
-        </p:txBody>
-      </p:sp>
-      <p:sp>
-        <p:nvSpPr>
-          <p:cNvPr id="85" name="TextBox 84"/>
-          <p:cNvSpPr txBox="1"/>
-          <p:nvPr/>
-        </p:nvSpPr>
-        <p:spPr>
-          <a:xfrm>
-            <a:off x="2468880" y="4727448"/>
-            <a:ext cx="1737360" cy="274320"/>
-          </a:xfrm>
-          <a:prstGeom prst="rect">
-            <a:avLst/>
-          </a:prstGeom>
-          <a:noFill/>
-        </p:spPr>
-        <p:txBody>
-          <a:bodyPr wrap="square">
-            <a:spAutoFit/>
-          </a:bodyPr>
-          <a:lstStyle/>
-          <a:p>
-            <a:pPr algn="l">
-              <a:spcBef>
-                <a:spcPts val="0"/>
-              </a:spcBef>
-              <a:spcAft>
-                <a:spcPts val="0"/>
-              </a:spcAft>
-              <a:defRPr sz="600" b="1">
-                <a:solidFill>
-                  <a:srgbClr val="1B2A4A"/>
-                </a:solidFill>
-                <a:latin typeface="Segoe UI"/>
-              </a:defRPr>
-            </a:pPr>
-            <a:r>
-              <a:t>2. Load intake config from</a:t>
+              <a:t>Orchestration &amp;</a:t>
             </a:r>
             <a:br/>
             <a:r>
-              <a:t>    MongoDB</a:t>
-            </a:r>
-          </a:p>
-        </p:txBody>
-      </p:sp>
-      <p:sp>
-        <p:nvSpPr>
-          <p:cNvPr id="86" name="Rounded Rectangle 85"/>
-          <p:cNvSpPr/>
-          <p:nvPr/>
-        </p:nvSpPr>
-        <p:spPr>
-          <a:xfrm>
-            <a:off x="4434840" y="4709160"/>
-            <a:ext cx="3200400" cy="320040"/>
-          </a:xfrm>
-          <a:prstGeom prst="roundRect">
-            <a:avLst/>
-          </a:prstGeom>
-          <a:solidFill>
-            <a:srgbClr val="F0F2F5"/>
-          </a:solidFill>
-          <a:ln w="12700">
-            <a:solidFill>
-              <a:srgbClr val="B0B8C5"/>
-            </a:solidFill>
-          </a:ln>
-        </p:spPr>
-        <p:style>
-          <a:lnRef idx="1">
-            <a:schemeClr val="accent1"/>
-          </a:lnRef>
-          <a:fillRef idx="3">
-            <a:schemeClr val="accent1"/>
-          </a:fillRef>
-          <a:effectRef idx="2">
-            <a:schemeClr val="accent1"/>
-          </a:effectRef>
-          <a:fontRef idx="minor">
-            <a:schemeClr val="lt1"/>
-          </a:fontRef>
-        </p:style>
-        <p:txBody>
-          <a:bodyPr rtlCol="0" anchor="ctr"/>
-          <a:lstStyle/>
-          <a:p>
-            <a:pPr algn="ctr"/>
-          </a:p>
-        </p:txBody>
-      </p:sp>
-      <p:sp>
-        <p:nvSpPr>
-          <p:cNvPr id="87" name="TextBox 86"/>
-          <p:cNvSpPr txBox="1"/>
-          <p:nvPr/>
-        </p:nvSpPr>
-        <p:spPr>
-          <a:xfrm>
-            <a:off x="4480560" y="4727448"/>
-            <a:ext cx="3108960" cy="274320"/>
-          </a:xfrm>
-          <a:prstGeom prst="rect">
-            <a:avLst/>
-          </a:prstGeom>
-          <a:noFill/>
-        </p:spPr>
-        <p:txBody>
-          <a:bodyPr wrap="square">
-            <a:spAutoFit/>
-          </a:bodyPr>
-          <a:lstStyle/>
-          <a:p>
-            <a:pPr algn="l">
-              <a:spcBef>
-                <a:spcPts val="0"/>
-              </a:spcBef>
-              <a:spcAft>
-                <a:spcPts val="0"/>
-              </a:spcAft>
-              <a:defRPr sz="600" b="1">
-                <a:solidFill>
-                  <a:srgbClr val="1B2A4A"/>
-                </a:solidFill>
-                <a:latin typeface="Segoe UI"/>
-              </a:defRPr>
-            </a:pPr>
-            <a:r>
-              <a:t>3. Agent LLM calls via Gemini</a:t>
-            </a:r>
-          </a:p>
-        </p:txBody>
-      </p:sp>
-      <p:sp>
-        <p:nvSpPr>
-          <p:cNvPr id="88" name="Rounded Rectangle 87"/>
-          <p:cNvSpPr/>
-          <p:nvPr/>
-        </p:nvSpPr>
-        <p:spPr>
-          <a:xfrm>
-            <a:off x="7818120" y="4709160"/>
-            <a:ext cx="2286000" cy="320040"/>
-          </a:xfrm>
-          <a:prstGeom prst="roundRect">
-            <a:avLst/>
-          </a:prstGeom>
-          <a:solidFill>
-            <a:srgbClr val="F0F2F5"/>
-          </a:solidFill>
-          <a:ln w="12700">
-            <a:solidFill>
-              <a:srgbClr val="B0B8C5"/>
-            </a:solidFill>
-          </a:ln>
-        </p:spPr>
-        <p:style>
-          <a:lnRef idx="1">
-            <a:schemeClr val="accent1"/>
-          </a:lnRef>
-          <a:fillRef idx="3">
-            <a:schemeClr val="accent1"/>
-          </a:fillRef>
-          <a:effectRef idx="2">
-            <a:schemeClr val="accent1"/>
-          </a:effectRef>
-          <a:fontRef idx="minor">
-            <a:schemeClr val="lt1"/>
-          </a:fontRef>
-        </p:style>
-        <p:txBody>
-          <a:bodyPr rtlCol="0" anchor="ctr"/>
-          <a:lstStyle/>
-          <a:p>
-            <a:pPr algn="ctr"/>
-          </a:p>
-        </p:txBody>
-      </p:sp>
-      <p:sp>
-        <p:nvSpPr>
-          <p:cNvPr id="89" name="TextBox 88"/>
-          <p:cNvSpPr txBox="1"/>
-          <p:nvPr/>
-        </p:nvSpPr>
-        <p:spPr>
-          <a:xfrm>
-            <a:off x="7863840" y="4727448"/>
-            <a:ext cx="2194560" cy="274320"/>
-          </a:xfrm>
-          <a:prstGeom prst="rect">
-            <a:avLst/>
-          </a:prstGeom>
-          <a:noFill/>
-        </p:spPr>
-        <p:txBody>
-          <a:bodyPr wrap="square">
-            <a:spAutoFit/>
-          </a:bodyPr>
-          <a:lstStyle/>
-          <a:p>
-            <a:pPr algn="l">
-              <a:spcBef>
-                <a:spcPts val="0"/>
-              </a:spcBef>
-              <a:spcAft>
-                <a:spcPts val="0"/>
-              </a:spcAft>
-              <a:defRPr sz="600" b="1">
-                <a:solidFill>
-                  <a:srgbClr val="1B2A4A"/>
-                </a:solidFill>
-                <a:latin typeface="Segoe UI"/>
-              </a:defRPr>
-            </a:pPr>
-            <a:r>
-              <a:t>All events logged with session_id + trace_id</a:t>
-            </a:r>
-          </a:p>
-        </p:txBody>
-      </p:sp>
-      <p:sp>
-        <p:nvSpPr>
-          <p:cNvPr id="90" name="Rounded Rectangle 89"/>
-          <p:cNvSpPr/>
-          <p:nvPr/>
-        </p:nvSpPr>
-        <p:spPr>
-          <a:xfrm>
-            <a:off x="137160" y="5120640"/>
-            <a:ext cx="2194560" cy="1508760"/>
-          </a:xfrm>
-          <a:prstGeom prst="roundRect">
-            <a:avLst/>
-          </a:prstGeom>
-          <a:solidFill>
-            <a:srgbClr val="F5F6F8"/>
-          </a:solidFill>
-          <a:ln w="19050">
-            <a:solidFill>
-              <a:srgbClr val="B0B8C5"/>
-            </a:solidFill>
-          </a:ln>
-        </p:spPr>
-        <p:style>
-          <a:lnRef idx="1">
-            <a:schemeClr val="accent1"/>
-          </a:lnRef>
-          <a:fillRef idx="3">
-            <a:schemeClr val="accent1"/>
-          </a:fillRef>
-          <a:effectRef idx="2">
-            <a:schemeClr val="accent1"/>
-          </a:effectRef>
-          <a:fontRef idx="minor">
-            <a:schemeClr val="lt1"/>
-          </a:fontRef>
-        </p:style>
-        <p:txBody>
-          <a:bodyPr rtlCol="0" anchor="ctr"/>
-          <a:lstStyle/>
-          <a:p>
-            <a:pPr algn="ctr"/>
-          </a:p>
-        </p:txBody>
-      </p:sp>
-      <p:sp>
-        <p:nvSpPr>
-          <p:cNvPr id="91" name="Oval 90"/>
-          <p:cNvSpPr/>
-          <p:nvPr/>
-        </p:nvSpPr>
-        <p:spPr>
-          <a:xfrm>
-            <a:off x="1783080" y="5193792"/>
-            <a:ext cx="274320" cy="274320"/>
-          </a:xfrm>
-          <a:prstGeom prst="ellipse">
-            <a:avLst/>
-          </a:prstGeom>
-          <a:solidFill>
-            <a:srgbClr val="00684A"/>
-          </a:solidFill>
-          <a:ln>
-            <a:noFill/>
-          </a:ln>
-        </p:spPr>
-        <p:style>
-          <a:lnRef idx="1">
-            <a:schemeClr val="accent1"/>
-          </a:lnRef>
-          <a:fillRef idx="3">
-            <a:schemeClr val="accent1"/>
-          </a:fillRef>
-          <a:effectRef idx="2">
-            <a:schemeClr val="accent1"/>
-          </a:effectRef>
-          <a:fontRef idx="minor">
-            <a:schemeClr val="lt1"/>
-          </a:fontRef>
-        </p:style>
-        <p:txBody>
-          <a:bodyPr rtlCol="0" anchor="ctr" wrap="none"/>
-          <a:lstStyle/>
-          <a:p>
-            <a:pPr algn="ctr">
-              <a:defRPr sz="1000">
-                <a:solidFill>
-                  <a:srgbClr val="FFFFFF"/>
-                </a:solidFill>
-              </a:defRPr>
-            </a:pPr>
-            <a:r>
-              <a:t>🗄</a:t>
-            </a:r>
-          </a:p>
-        </p:txBody>
-      </p:sp>
-      <p:sp>
-        <p:nvSpPr>
-          <p:cNvPr id="92" name="TextBox 91"/>
-          <p:cNvSpPr txBox="1"/>
-          <p:nvPr/>
-        </p:nvSpPr>
-        <p:spPr>
-          <a:xfrm>
-            <a:off x="228600" y="5193792"/>
-            <a:ext cx="1463040" cy="228600"/>
-          </a:xfrm>
-          <a:prstGeom prst="rect">
-            <a:avLst/>
-          </a:prstGeom>
-          <a:noFill/>
-        </p:spPr>
-        <p:txBody>
-          <a:bodyPr wrap="square">
-            <a:spAutoFit/>
-          </a:bodyPr>
-          <a:lstStyle/>
-          <a:p>
-            <a:pPr algn="l">
-              <a:spcBef>
-                <a:spcPts val="0"/>
-              </a:spcBef>
-              <a:spcAft>
-                <a:spcPts val="0"/>
-              </a:spcAft>
-              <a:defRPr sz="1100" b="1">
-                <a:solidFill>
-                  <a:srgbClr val="00684A"/>
-                </a:solidFill>
-                <a:latin typeface="Segoe UI"/>
-              </a:defRPr>
-            </a:pPr>
-            <a:r>
-              <a:t>MongoDB</a:t>
-            </a:r>
-          </a:p>
-        </p:txBody>
-      </p:sp>
-      <p:sp>
-        <p:nvSpPr>
-          <p:cNvPr id="93" name="TextBox 92"/>
-          <p:cNvSpPr txBox="1"/>
-          <p:nvPr/>
-        </p:nvSpPr>
-        <p:spPr>
-          <a:xfrm>
-            <a:off x="228600" y="5486400"/>
-            <a:ext cx="2011680" cy="1005840"/>
-          </a:xfrm>
-          <a:prstGeom prst="rect">
-            <a:avLst/>
-          </a:prstGeom>
-          <a:noFill/>
-        </p:spPr>
-        <p:txBody>
-          <a:bodyPr wrap="square">
-            <a:spAutoFit/>
-          </a:bodyPr>
-          <a:lstStyle/>
-          <a:p>
-            <a:pPr algn="l">
-              <a:spcBef>
-                <a:spcPts val="0"/>
-              </a:spcBef>
-              <a:spcAft>
-                <a:spcPts val="0"/>
-              </a:spcAft>
-              <a:defRPr sz="700" b="1">
-                <a:solidFill>
-                  <a:srgbClr val="404A58"/>
-                </a:solidFill>
-                <a:latin typeface="Segoe UI"/>
-              </a:defRPr>
-            </a:pPr>
-            <a:r>
-              <a:t>Intake Configs (runtime)</a:t>
-            </a:r>
-          </a:p>
-          <a:p>
-            <a:pPr algn="l">
-              <a:spcBef>
-                <a:spcPts val="0"/>
-              </a:spcBef>
-              <a:spcAft>
-                <a:spcPts val="0"/>
-              </a:spcAft>
-              <a:defRPr sz="700" b="1">
-                <a:solidFill>
-                  <a:srgbClr val="404A58"/>
-                </a:solidFill>
-                <a:latin typeface="Segoe UI"/>
-              </a:defRPr>
-            </a:pPr>
-            <a:r>
-              <a:t>Session Storage &amp; State</a:t>
-            </a:r>
-          </a:p>
-          <a:p>
-            <a:pPr algn="l">
-              <a:spcBef>
-                <a:spcPts val="0"/>
-              </a:spcBef>
-              <a:spcAft>
-                <a:spcPts val="0"/>
-              </a:spcAft>
-              <a:defRPr sz="700" b="0">
-                <a:solidFill>
-                  <a:srgbClr val="404A58"/>
-                </a:solidFill>
-                <a:latin typeface="Segoe UI"/>
-              </a:defRPr>
-            </a:pPr>
-            <a:r>
-              <a:t>Intake Answers</a:t>
-            </a:r>
-          </a:p>
-          <a:p>
-            <a:pPr algn="l">
-              <a:spcBef>
-                <a:spcPts val="0"/>
-              </a:spcBef>
-              <a:spcAft>
-                <a:spcPts val="0"/>
-              </a:spcAft>
-              <a:defRPr sz="700" b="0">
-                <a:solidFill>
-                  <a:srgbClr val="404A58"/>
-                </a:solidFill>
-                <a:latin typeface="Segoe UI"/>
-              </a:defRPr>
-            </a:pPr>
-            <a:r>
-              <a:t>Conversation History</a:t>
-            </a:r>
-          </a:p>
-        </p:txBody>
-      </p:sp>
-      <p:sp>
-        <p:nvSpPr>
-          <p:cNvPr id="94" name="Rounded Rectangle 93"/>
-          <p:cNvSpPr/>
-          <p:nvPr/>
-        </p:nvSpPr>
-        <p:spPr>
-          <a:xfrm>
-            <a:off x="2514600" y="5120640"/>
-            <a:ext cx="2011680" cy="1508760"/>
-          </a:xfrm>
-          <a:prstGeom prst="roundRect">
-            <a:avLst/>
-          </a:prstGeom>
-          <a:solidFill>
-            <a:srgbClr val="F5F6F8"/>
-          </a:solidFill>
-          <a:ln w="19050">
-            <a:solidFill>
-              <a:srgbClr val="B0B8C5"/>
-            </a:solidFill>
-          </a:ln>
-        </p:spPr>
-        <p:style>
-          <a:lnRef idx="1">
-            <a:schemeClr val="accent1"/>
-          </a:lnRef>
-          <a:fillRef idx="3">
-            <a:schemeClr val="accent1"/>
-          </a:fillRef>
-          <a:effectRef idx="2">
-            <a:schemeClr val="accent1"/>
-          </a:effectRef>
-          <a:fontRef idx="minor">
-            <a:schemeClr val="lt1"/>
-          </a:fontRef>
-        </p:style>
-        <p:txBody>
-          <a:bodyPr rtlCol="0" anchor="ctr"/>
-          <a:lstStyle/>
-          <a:p>
-            <a:pPr algn="ctr"/>
-          </a:p>
-        </p:txBody>
-      </p:sp>
-      <p:sp>
-        <p:nvSpPr>
-          <p:cNvPr id="95" name="Oval 94"/>
-          <p:cNvSpPr/>
-          <p:nvPr/>
-        </p:nvSpPr>
-        <p:spPr>
-          <a:xfrm>
-            <a:off x="3977639" y="5193792"/>
-            <a:ext cx="274320" cy="274320"/>
-          </a:xfrm>
-          <a:prstGeom prst="ellipse">
-            <a:avLst/>
-          </a:prstGeom>
-          <a:solidFill>
-            <a:srgbClr val="D4A843"/>
-          </a:solidFill>
-          <a:ln>
-            <a:noFill/>
-          </a:ln>
-        </p:spPr>
-        <p:style>
-          <a:lnRef idx="1">
-            <a:schemeClr val="accent1"/>
-          </a:lnRef>
-          <a:fillRef idx="3">
-            <a:schemeClr val="accent1"/>
-          </a:fillRef>
-          <a:effectRef idx="2">
-            <a:schemeClr val="accent1"/>
-          </a:effectRef>
-          <a:fontRef idx="minor">
-            <a:schemeClr val="lt1"/>
-          </a:fontRef>
-        </p:style>
-        <p:txBody>
-          <a:bodyPr rtlCol="0" anchor="ctr" wrap="none"/>
-          <a:lstStyle/>
-          <a:p>
-            <a:pPr algn="ctr">
-              <a:defRPr sz="1000">
-                <a:solidFill>
-                  <a:srgbClr val="FFFFFF"/>
-                </a:solidFill>
-              </a:defRPr>
-            </a:pPr>
-            <a:r>
-              <a:t>📄</a:t>
-            </a:r>
-          </a:p>
-        </p:txBody>
-      </p:sp>
-      <p:sp>
-        <p:nvSpPr>
-          <p:cNvPr id="96" name="TextBox 95"/>
-          <p:cNvSpPr txBox="1"/>
-          <p:nvPr/>
-        </p:nvSpPr>
-        <p:spPr>
-          <a:xfrm>
-            <a:off x="2606040" y="5193792"/>
-            <a:ext cx="1371600" cy="411480"/>
-          </a:xfrm>
-          <a:prstGeom prst="rect">
-            <a:avLst/>
-          </a:prstGeom>
-          <a:noFill/>
-        </p:spPr>
-        <p:txBody>
-          <a:bodyPr wrap="square">
-            <a:spAutoFit/>
-          </a:bodyPr>
-          <a:lstStyle/>
-          <a:p>
-            <a:pPr algn="l">
-              <a:spcBef>
-                <a:spcPts val="0"/>
-              </a:spcBef>
-              <a:spcAft>
-                <a:spcPts val="0"/>
-              </a:spcAft>
-              <a:defRPr sz="900" b="1">
-                <a:solidFill>
-                  <a:srgbClr val="1B2A4A"/>
-                </a:solidFill>
-                <a:latin typeface="Segoe UI"/>
-              </a:defRPr>
-            </a:pPr>
-            <a:r>
-              <a:t>YAML Config</a:t>
-            </a:r>
-            <a:br/>
-            <a:r>
-              <a:t>Files  (authoring)</a:t>
-            </a:r>
-          </a:p>
-        </p:txBody>
-      </p:sp>
-      <p:sp>
-        <p:nvSpPr>
-          <p:cNvPr id="97" name="TextBox 96"/>
-          <p:cNvSpPr txBox="1"/>
-          <p:nvPr/>
-        </p:nvSpPr>
-        <p:spPr>
-          <a:xfrm>
-            <a:off x="2606040" y="5623560"/>
-            <a:ext cx="1828800" cy="914400"/>
-          </a:xfrm>
-          <a:prstGeom prst="rect">
-            <a:avLst/>
-          </a:prstGeom>
-          <a:noFill/>
-        </p:spPr>
-        <p:txBody>
-          <a:bodyPr wrap="square">
-            <a:spAutoFit/>
-          </a:bodyPr>
-          <a:lstStyle/>
-          <a:p>
-            <a:pPr algn="l">
-              <a:spcBef>
-                <a:spcPts val="0"/>
-              </a:spcBef>
-              <a:spcAft>
-                <a:spcPts val="0"/>
-              </a:spcAft>
-              <a:defRPr sz="600" b="1">
-                <a:solidFill>
-                  <a:srgbClr val="404A58"/>
-                </a:solidFill>
-                <a:latin typeface="Segoe UI"/>
-              </a:defRPr>
-            </a:pPr>
-            <a:r>
-              <a:t>product_feature_intake.yaml</a:t>
-            </a:r>
-          </a:p>
-          <a:p>
-            <a:pPr algn="l">
-              <a:spcBef>
-                <a:spcPts val="0"/>
-              </a:spcBef>
-              <a:spcAft>
-                <a:spcPts val="0"/>
-              </a:spcAft>
-              <a:defRPr sz="600" b="1">
-                <a:solidFill>
-                  <a:srgbClr val="404A58"/>
-                </a:solidFill>
-                <a:latin typeface="Segoe UI"/>
-              </a:defRPr>
-            </a:pPr>
-            <a:r>
-              <a:t>11 placeholder configs</a:t>
-            </a:r>
-          </a:p>
-          <a:p>
-            <a:pPr algn="l">
-              <a:spcBef>
-                <a:spcPts val="0"/>
-              </a:spcBef>
-              <a:spcAft>
-                <a:spcPts val="0"/>
-              </a:spcAft>
-              <a:defRPr sz="600" b="0">
-                <a:solidFill>
-                  <a:srgbClr val="404A58"/>
-                </a:solidFill>
-                <a:latin typeface="Segoe UI"/>
-              </a:defRPr>
-            </a:pPr>
-            <a:r>
-              <a:t>Source of truth for authoring.</a:t>
-            </a:r>
-          </a:p>
-          <a:p>
-            <a:pPr algn="l">
-              <a:spcBef>
-                <a:spcPts val="0"/>
-              </a:spcBef>
-              <a:spcAft>
-                <a:spcPts val="0"/>
-              </a:spcAft>
-              <a:defRPr sz="600" b="0">
-                <a:solidFill>
-                  <a:srgbClr val="404A58"/>
-                </a:solidFill>
-                <a:latin typeface="Segoe UI"/>
-              </a:defRPr>
-            </a:pPr>
-            <a:r>
-              <a:t>Imported into MongoDB at</a:t>
-            </a:r>
-          </a:p>
-          <a:p>
-            <a:pPr algn="l">
-              <a:spcBef>
-                <a:spcPts val="0"/>
-              </a:spcBef>
-              <a:spcAft>
-                <a:spcPts val="0"/>
-              </a:spcAft>
-              <a:defRPr sz="600" b="0">
-                <a:solidFill>
-                  <a:srgbClr val="404A58"/>
-                </a:solidFill>
-                <a:latin typeface="Segoe UI"/>
-              </a:defRPr>
-            </a:pPr>
-            <a:r>
-              <a:t>startup or via CLI sync.</a:t>
-            </a:r>
-          </a:p>
-        </p:txBody>
-      </p:sp>
-      <p:sp>
-        <p:nvSpPr>
-          <p:cNvPr id="98" name="TextBox 97"/>
-          <p:cNvSpPr txBox="1"/>
-          <p:nvPr/>
-        </p:nvSpPr>
-        <p:spPr>
-          <a:xfrm>
-            <a:off x="2240280" y="5394960"/>
-            <a:ext cx="274320" cy="914400"/>
-          </a:xfrm>
-          <a:prstGeom prst="rect">
-            <a:avLst/>
-          </a:prstGeom>
-          <a:noFill/>
-        </p:spPr>
-        <p:txBody>
-          <a:bodyPr wrap="square">
-            <a:spAutoFit/>
-          </a:bodyPr>
-          <a:lstStyle/>
-          <a:p>
-            <a:pPr algn="ctr">
-              <a:spcBef>
-                <a:spcPts val="0"/>
-              </a:spcBef>
-              <a:spcAft>
-                <a:spcPts val="0"/>
-              </a:spcAft>
-              <a:defRPr sz="500" b="1">
-                <a:solidFill>
-                  <a:srgbClr val="00684A"/>
-                </a:solidFill>
-                <a:latin typeface="Segoe UI"/>
-              </a:defRPr>
-            </a:pPr>
-            <a:r>
-              <a:t>import at startup</a:t>
-            </a:r>
-          </a:p>
-        </p:txBody>
-      </p:sp>
-      <p:sp>
-        <p:nvSpPr>
-          <p:cNvPr id="99" name="Right Arrow 98"/>
-          <p:cNvSpPr/>
-          <p:nvPr/>
-        </p:nvSpPr>
-        <p:spPr>
-          <a:xfrm rot="10800000">
-            <a:off x="2148840" y="5577840"/>
-            <a:ext cx="274320" cy="137160"/>
-          </a:xfrm>
-          <a:prstGeom prst="rightArrow">
-            <a:avLst/>
-          </a:prstGeom>
-          <a:solidFill>
-            <a:srgbClr val="00684A"/>
-          </a:solidFill>
-          <a:ln>
-            <a:noFill/>
-          </a:ln>
-        </p:spPr>
-        <p:style>
-          <a:lnRef idx="1">
-            <a:schemeClr val="accent1"/>
-          </a:lnRef>
-          <a:fillRef idx="3">
-            <a:schemeClr val="accent1"/>
-          </a:fillRef>
-          <a:effectRef idx="2">
-            <a:schemeClr val="accent1"/>
-          </a:effectRef>
-          <a:fontRef idx="minor">
-            <a:schemeClr val="lt1"/>
-          </a:fontRef>
-        </p:style>
-        <p:txBody>
-          <a:bodyPr rtlCol="0" anchor="ctr"/>
-          <a:lstStyle/>
-          <a:p>
-            <a:pPr algn="ctr"/>
-          </a:p>
-        </p:txBody>
-      </p:sp>
-      <p:sp>
-        <p:nvSpPr>
-          <p:cNvPr id="100" name="Rounded Rectangle 99"/>
-          <p:cNvSpPr/>
-          <p:nvPr/>
-        </p:nvSpPr>
-        <p:spPr>
-          <a:xfrm>
-            <a:off x="4709160" y="5120640"/>
-            <a:ext cx="2926080" cy="1508760"/>
-          </a:xfrm>
-          <a:prstGeom prst="roundRect">
-            <a:avLst/>
-          </a:prstGeom>
-          <a:solidFill>
-            <a:srgbClr val="F5F6F8"/>
-          </a:solidFill>
-          <a:ln w="19050">
-            <a:solidFill>
-              <a:srgbClr val="B0B8C5"/>
-            </a:solidFill>
-          </a:ln>
-        </p:spPr>
-        <p:style>
-          <a:lnRef idx="1">
-            <a:schemeClr val="accent1"/>
-          </a:lnRef>
-          <a:fillRef idx="3">
-            <a:schemeClr val="accent1"/>
-          </a:fillRef>
-          <a:effectRef idx="2">
-            <a:schemeClr val="accent1"/>
-          </a:effectRef>
-          <a:fontRef idx="minor">
-            <a:schemeClr val="lt1"/>
-          </a:fontRef>
-        </p:style>
-        <p:txBody>
-          <a:bodyPr rtlCol="0" anchor="ctr"/>
-          <a:lstStyle/>
-          <a:p>
-            <a:pPr algn="ctr"/>
-          </a:p>
-        </p:txBody>
-      </p:sp>
-      <p:sp>
-        <p:nvSpPr>
-          <p:cNvPr id="101" name="Oval 100"/>
-          <p:cNvSpPr/>
-          <p:nvPr/>
-        </p:nvSpPr>
-        <p:spPr>
-          <a:xfrm>
-            <a:off x="7086600" y="5193792"/>
-            <a:ext cx="274320" cy="274320"/>
-          </a:xfrm>
-          <a:prstGeom prst="ellipse">
-            <a:avLst/>
-          </a:prstGeom>
-          <a:solidFill>
-            <a:srgbClr val="D4A843"/>
-          </a:solidFill>
-          <a:ln>
-            <a:noFill/>
-          </a:ln>
-        </p:spPr>
-        <p:style>
-          <a:lnRef idx="1">
-            <a:schemeClr val="accent1"/>
-          </a:lnRef>
-          <a:fillRef idx="3">
-            <a:schemeClr val="accent1"/>
-          </a:fillRef>
-          <a:effectRef idx="2">
-            <a:schemeClr val="accent1"/>
-          </a:effectRef>
-          <a:fontRef idx="minor">
-            <a:schemeClr val="lt1"/>
-          </a:fontRef>
-        </p:style>
-        <p:txBody>
-          <a:bodyPr rtlCol="0" anchor="ctr" wrap="none"/>
-          <a:lstStyle/>
-          <a:p>
-            <a:pPr algn="ctr">
-              <a:defRPr sz="1000">
-                <a:solidFill>
-                  <a:srgbClr val="FFFFFF"/>
-                </a:solidFill>
-              </a:defRPr>
-            </a:pPr>
-            <a:r>
-              <a:t>🔄</a:t>
-            </a:r>
-          </a:p>
-        </p:txBody>
-      </p:sp>
-      <p:sp>
-        <p:nvSpPr>
-          <p:cNvPr id="102" name="TextBox 101"/>
-          <p:cNvSpPr txBox="1"/>
-          <p:nvPr/>
-        </p:nvSpPr>
-        <p:spPr>
-          <a:xfrm>
-            <a:off x="4800600" y="5193792"/>
-            <a:ext cx="2286000" cy="228600"/>
-          </a:xfrm>
-          <a:prstGeom prst="rect">
-            <a:avLst/>
-          </a:prstGeom>
-          <a:noFill/>
-        </p:spPr>
-        <p:txBody>
-          <a:bodyPr wrap="square">
-            <a:spAutoFit/>
-          </a:bodyPr>
-          <a:lstStyle/>
-          <a:p>
-            <a:pPr algn="l">
-              <a:spcBef>
-                <a:spcPts val="0"/>
-              </a:spcBef>
-              <a:spcAft>
-                <a:spcPts val="0"/>
-              </a:spcAft>
-              <a:defRPr sz="1000" b="1">
-                <a:solidFill>
-                  <a:srgbClr val="1B2A4A"/>
-                </a:solidFill>
-                <a:latin typeface="Segoe UI"/>
-              </a:defRPr>
-            </a:pPr>
-            <a:r>
-              <a:t>Google Gemini 2.0 Flash  (LLM)</a:t>
-            </a:r>
-          </a:p>
-        </p:txBody>
-      </p:sp>
-      <p:sp>
-        <p:nvSpPr>
-          <p:cNvPr id="103" name="Rounded Rectangle 102"/>
-          <p:cNvSpPr/>
-          <p:nvPr/>
-        </p:nvSpPr>
-        <p:spPr>
-          <a:xfrm>
-            <a:off x="4800600" y="5532120"/>
-            <a:ext cx="1234440" cy="457200"/>
-          </a:xfrm>
-          <a:prstGeom prst="roundRect">
-            <a:avLst/>
-          </a:prstGeom>
-          <a:solidFill>
-            <a:srgbClr val="F5F6F8"/>
-          </a:solidFill>
-          <a:ln w="12700">
-            <a:solidFill>
-              <a:srgbClr val="B0B8C5"/>
-            </a:solidFill>
-          </a:ln>
-        </p:spPr>
-        <p:style>
-          <a:lnRef idx="1">
-            <a:schemeClr val="accent1"/>
-          </a:lnRef>
-          <a:fillRef idx="3">
-            <a:schemeClr val="accent1"/>
-          </a:fillRef>
-          <a:effectRef idx="2">
-            <a:schemeClr val="accent1"/>
-          </a:effectRef>
-          <a:fontRef idx="minor">
-            <a:schemeClr val="lt1"/>
-          </a:fontRef>
-        </p:style>
-        <p:txBody>
-          <a:bodyPr rtlCol="0" anchor="ctr" wrap="square"/>
-          <a:lstStyle/>
-          <a:p>
-            <a:pPr algn="ctr">
-              <a:defRPr sz="600" b="1">
-                <a:solidFill>
-                  <a:srgbClr val="404A58"/>
-                </a:solidFill>
-                <a:latin typeface="Segoe UI"/>
-              </a:defRPr>
-            </a:pPr>
-            <a:r>
-              <a:t>Agent LLM Calls</a:t>
-            </a:r>
-            <a:br/>
-            <a:r>
-              <a:t>(reasoning, validation,</a:t>
-            </a:r>
-            <a:br/>
-            <a:r>
-              <a:t>classification, assist)</a:t>
-            </a:r>
-          </a:p>
-        </p:txBody>
-      </p:sp>
-      <p:sp>
-        <p:nvSpPr>
-          <p:cNvPr id="104" name="Rounded Rectangle 103"/>
-          <p:cNvSpPr/>
-          <p:nvPr/>
-        </p:nvSpPr>
-        <p:spPr>
-          <a:xfrm>
-            <a:off x="6217920" y="5532120"/>
-            <a:ext cx="1234440" cy="457200"/>
-          </a:xfrm>
-          <a:prstGeom prst="roundRect">
-            <a:avLst/>
-          </a:prstGeom>
-          <a:solidFill>
-            <a:srgbClr val="F5F6F8"/>
-          </a:solidFill>
-          <a:ln w="12700">
-            <a:solidFill>
-              <a:srgbClr val="B0B8C5"/>
-            </a:solidFill>
-          </a:ln>
-        </p:spPr>
-        <p:style>
-          <a:lnRef idx="1">
-            <a:schemeClr val="accent1"/>
-          </a:lnRef>
-          <a:fillRef idx="3">
-            <a:schemeClr val="accent1"/>
-          </a:fillRef>
-          <a:effectRef idx="2">
-            <a:schemeClr val="accent1"/>
-          </a:effectRef>
-          <a:fontRef idx="minor">
-            <a:schemeClr val="lt1"/>
-          </a:fontRef>
-        </p:style>
-        <p:txBody>
-          <a:bodyPr rtlCol="0" anchor="ctr" wrap="square"/>
-          <a:lstStyle/>
-          <a:p>
-            <a:pPr algn="ctr">
-              <a:defRPr sz="600" b="1">
-                <a:solidFill>
-                  <a:srgbClr val="404A58"/>
-                </a:solidFill>
-                <a:latin typeface="Segoe UI"/>
-              </a:defRPr>
-            </a:pPr>
-            <a:r>
-              <a:t>ADK Runner</a:t>
-            </a:r>
-            <a:br/>
-            <a:r>
-              <a:t>Orchestration &amp;</a:t>
-            </a:r>
-            <a:br/>
-            <a:r>
               <a:t>Session Mgmt</a:t>
-            </a:r>
-          </a:p>
-        </p:txBody>
-      </p:sp>
-      <p:sp>
-        <p:nvSpPr>
-          <p:cNvPr id="105" name="Rounded Rectangle 104"/>
-          <p:cNvSpPr/>
-          <p:nvPr/>
-        </p:nvSpPr>
-        <p:spPr>
-          <a:xfrm>
-            <a:off x="7818120" y="5120640"/>
-            <a:ext cx="4160520" cy="1508760"/>
-          </a:xfrm>
-          <a:prstGeom prst="roundRect">
-            <a:avLst/>
-          </a:prstGeom>
-          <a:solidFill>
-            <a:srgbClr val="F5F6F8"/>
-          </a:solidFill>
-          <a:ln w="19050">
-            <a:solidFill>
-              <a:srgbClr val="B0B8C5"/>
-            </a:solidFill>
-          </a:ln>
-        </p:spPr>
-        <p:style>
-          <a:lnRef idx="1">
-            <a:schemeClr val="accent1"/>
-          </a:lnRef>
-          <a:fillRef idx="3">
-            <a:schemeClr val="accent1"/>
-          </a:fillRef>
-          <a:effectRef idx="2">
-            <a:schemeClr val="accent1"/>
-          </a:effectRef>
-          <a:fontRef idx="minor">
-            <a:schemeClr val="lt1"/>
-          </a:fontRef>
-        </p:style>
-        <p:txBody>
-          <a:bodyPr rtlCol="0" anchor="ctr"/>
-          <a:lstStyle/>
-          <a:p>
-            <a:pPr algn="ctr"/>
-          </a:p>
-        </p:txBody>
-      </p:sp>
-      <p:sp>
-        <p:nvSpPr>
-          <p:cNvPr id="106" name="Oval 105"/>
-          <p:cNvSpPr/>
-          <p:nvPr/>
-        </p:nvSpPr>
-        <p:spPr>
-          <a:xfrm>
-            <a:off x="11430000" y="5193792"/>
-            <a:ext cx="274320" cy="274320"/>
-          </a:xfrm>
-          <a:prstGeom prst="ellipse">
-            <a:avLst/>
-          </a:prstGeom>
-          <a:solidFill>
-            <a:srgbClr val="4CAF50"/>
-          </a:solidFill>
-          <a:ln>
-            <a:noFill/>
-          </a:ln>
-        </p:spPr>
-        <p:style>
-          <a:lnRef idx="1">
-            <a:schemeClr val="accent1"/>
-          </a:lnRef>
-          <a:fillRef idx="3">
-            <a:schemeClr val="accent1"/>
-          </a:fillRef>
-          <a:effectRef idx="2">
-            <a:schemeClr val="accent1"/>
-          </a:effectRef>
-          <a:fontRef idx="minor">
-            <a:schemeClr val="lt1"/>
-          </a:fontRef>
-        </p:style>
-        <p:txBody>
-          <a:bodyPr rtlCol="0" anchor="ctr" wrap="none"/>
-          <a:lstStyle/>
-          <a:p>
-            <a:pPr algn="ctr">
-              <a:defRPr sz="1000">
-                <a:solidFill>
-                  <a:srgbClr val="FFFFFF"/>
-                </a:solidFill>
-              </a:defRPr>
-            </a:pPr>
-            <a:r>
-              <a:t>📋</a:t>
-            </a:r>
-          </a:p>
-        </p:txBody>
-      </p:sp>
-      <p:sp>
-        <p:nvSpPr>
-          <p:cNvPr id="107" name="TextBox 106"/>
-          <p:cNvSpPr txBox="1"/>
-          <p:nvPr/>
-        </p:nvSpPr>
-        <p:spPr>
-          <a:xfrm>
-            <a:off x="7909560" y="5193792"/>
-            <a:ext cx="3200400" cy="228600"/>
-          </a:xfrm>
-          <a:prstGeom prst="rect">
-            <a:avLst/>
-          </a:prstGeom>
-          <a:noFill/>
-        </p:spPr>
-        <p:txBody>
-          <a:bodyPr wrap="square">
-            <a:spAutoFit/>
-          </a:bodyPr>
-          <a:lstStyle/>
-          <a:p>
-            <a:pPr algn="l">
-              <a:spcBef>
-                <a:spcPts val="0"/>
-              </a:spcBef>
-              <a:spcAft>
-                <a:spcPts val="0"/>
-              </a:spcAft>
-              <a:defRPr sz="1000" b="1">
-                <a:solidFill>
-                  <a:srgbClr val="1B2A4A"/>
-                </a:solidFill>
-                <a:latin typeface="Segoe UI"/>
-              </a:defRPr>
-            </a:pPr>
-            <a:r>
-              <a:t>Structured JSON Logs</a:t>
-            </a:r>
-          </a:p>
-        </p:txBody>
-      </p:sp>
-      <p:sp>
-        <p:nvSpPr>
-          <p:cNvPr id="108" name="TextBox 107"/>
-          <p:cNvSpPr txBox="1"/>
-          <p:nvPr/>
-        </p:nvSpPr>
-        <p:spPr>
-          <a:xfrm>
-            <a:off x="7909560" y="5486400"/>
-            <a:ext cx="3931920" cy="1005840"/>
-          </a:xfrm>
-          <a:prstGeom prst="rect">
-            <a:avLst/>
-          </a:prstGeom>
-          <a:noFill/>
-        </p:spPr>
-        <p:txBody>
-          <a:bodyPr wrap="square">
-            <a:spAutoFit/>
-          </a:bodyPr>
-          <a:lstStyle/>
-          <a:p>
-            <a:pPr algn="l">
-              <a:spcBef>
-                <a:spcPts val="0"/>
-              </a:spcBef>
-              <a:spcAft>
-                <a:spcPts val="0"/>
-              </a:spcAft>
-              <a:defRPr sz="700" b="1">
-                <a:solidFill>
-                  <a:srgbClr val="404A58"/>
-                </a:solidFill>
-                <a:latin typeface="Segoe UI"/>
-              </a:defRPr>
-            </a:pPr>
-            <a:r>
-              <a:t>app.log — application events &amp; HTTP</a:t>
-            </a:r>
-          </a:p>
-          <a:p>
-            <a:pPr algn="l">
-              <a:spcBef>
-                <a:spcPts val="0"/>
-              </a:spcBef>
-              <a:spcAft>
-                <a:spcPts val="0"/>
-              </a:spcAft>
-              <a:defRPr sz="700" b="1">
-                <a:solidFill>
-                  <a:srgbClr val="404A58"/>
-                </a:solidFill>
-                <a:latin typeface="Segoe UI"/>
-              </a:defRPr>
-            </a:pPr>
-            <a:r>
-              <a:t>agent_audit.log — LLM calls &amp; agent decisions</a:t>
-            </a:r>
-          </a:p>
-          <a:p>
-            <a:pPr algn="l">
-              <a:spcBef>
-                <a:spcPts val="0"/>
-              </a:spcBef>
-              <a:spcAft>
-                <a:spcPts val="0"/>
-              </a:spcAft>
-              <a:defRPr sz="700" b="1">
-                <a:solidFill>
-                  <a:srgbClr val="404A58"/>
-                </a:solidFill>
-                <a:latin typeface="Segoe UI"/>
-              </a:defRPr>
-            </a:pPr>
-            <a:r>
-              <a:t>conversation_audit.log — full chat history</a:t>
-            </a:r>
-          </a:p>
-          <a:p>
-            <a:pPr algn="l">
-              <a:spcBef>
-                <a:spcPts val="0"/>
-              </a:spcBef>
-              <a:spcAft>
-                <a:spcPts val="0"/>
-              </a:spcAft>
-              <a:defRPr sz="700" b="1">
-                <a:solidFill>
-                  <a:srgbClr val="404A58"/>
-                </a:solidFill>
-                <a:latin typeface="Segoe UI"/>
-              </a:defRPr>
-            </a:pPr>
-            <a:r>
-              <a:t>platform_audit.log — Jira API calls (sanitized)</a:t>
             </a:r>
           </a:p>
         </p:txBody>
       </p:sp>
       <p:cxnSp>
         <p:nvCxnSpPr>
-          <p:cNvPr id="109" name="Connector 108"/>
+          <p:cNvPr id="70" name="Connector 69"/>
           <p:cNvCxnSpPr/>
           <p:nvPr/>
         </p:nvCxnSpPr>
         <p:spPr>
           <a:xfrm flipV="1">
-            <a:off x="1234440" y="4846320"/>
-            <a:ext cx="2057400" cy="274320"/>
+            <a:off x="5966460.0" y="4343400"/>
+            <a:ext cx="0.0" cy="320040"/>
           </a:xfrm>
           <a:prstGeom prst="line">
             <a:avLst/>
           </a:prstGeom>
-          <a:ln w="19050">
+          <a:ln w="25400">
             <a:solidFill>
-              <a:srgbClr val="00684A"/>
+              <a:srgbClr val="D4A843"/>
             </a:solidFill>
             <a:prstDash val="sysDash"/>
           </a:ln>
@@ -8777,57 +6696,207 @@
           </a:fontRef>
         </p:style>
       </p:cxnSp>
+      <p:sp>
+        <p:nvSpPr>
+          <p:cNvPr id="71" name="Rounded Rectangle 70"/>
+          <p:cNvSpPr/>
+          <p:nvPr/>
+        </p:nvSpPr>
+        <p:spPr>
+          <a:xfrm>
+            <a:off x="7178040" y="4663440"/>
+            <a:ext cx="4846320" cy="1920240"/>
+          </a:xfrm>
+          <a:prstGeom prst="roundRect">
+            <a:avLst/>
+          </a:prstGeom>
+          <a:solidFill>
+            <a:srgbClr val="F5F6F8"/>
+          </a:solidFill>
+          <a:ln w="19050">
+            <a:solidFill>
+              <a:srgbClr val="4CAF50"/>
+            </a:solidFill>
+          </a:ln>
+        </p:spPr>
+        <p:style>
+          <a:lnRef idx="1">
+            <a:schemeClr val="accent1"/>
+          </a:lnRef>
+          <a:fillRef idx="3">
+            <a:schemeClr val="accent1"/>
+          </a:fillRef>
+          <a:effectRef idx="2">
+            <a:schemeClr val="accent1"/>
+          </a:effectRef>
+          <a:fontRef idx="minor">
+            <a:schemeClr val="lt1"/>
+          </a:fontRef>
+        </p:style>
+        <p:txBody>
+          <a:bodyPr rtlCol="0" anchor="ctr"/>
+          <a:lstStyle/>
+          <a:p>
+            <a:pPr algn="ctr"/>
+          </a:p>
+        </p:txBody>
+      </p:sp>
+      <p:sp>
+        <p:nvSpPr>
+          <p:cNvPr id="72" name="TextBox 71"/>
+          <p:cNvSpPr txBox="1"/>
+          <p:nvPr/>
+        </p:nvSpPr>
+        <p:spPr>
+          <a:xfrm>
+            <a:off x="7269480" y="4736592"/>
+            <a:ext cx="4572000" cy="228600"/>
+          </a:xfrm>
+          <a:prstGeom prst="rect">
+            <a:avLst/>
+          </a:prstGeom>
+          <a:noFill/>
+        </p:spPr>
+        <p:txBody>
+          <a:bodyPr wrap="square">
+            <a:spAutoFit/>
+          </a:bodyPr>
+          <a:lstStyle/>
+          <a:p>
+            <a:pPr algn="l">
+              <a:spcBef>
+                <a:spcPts val="0"/>
+              </a:spcBef>
+              <a:spcAft>
+                <a:spcPts val="0"/>
+              </a:spcAft>
+              <a:defRPr sz="1100" b="1">
+                <a:solidFill>
+                  <a:srgbClr val="1B2A4A"/>
+                </a:solidFill>
+                <a:latin typeface="Segoe UI"/>
+              </a:defRPr>
+            </a:pPr>
+            <a:r>
+              <a:t>Structured JSON Logs</a:t>
+            </a:r>
+          </a:p>
+        </p:txBody>
+      </p:sp>
+      <p:sp>
+        <p:nvSpPr>
+          <p:cNvPr id="73" name="TextBox 72"/>
+          <p:cNvSpPr txBox="1"/>
+          <p:nvPr/>
+        </p:nvSpPr>
+        <p:spPr>
+          <a:xfrm>
+            <a:off x="7269480" y="5029200"/>
+            <a:ext cx="4572000" cy="1371600"/>
+          </a:xfrm>
+          <a:prstGeom prst="rect">
+            <a:avLst/>
+          </a:prstGeom>
+          <a:noFill/>
+        </p:spPr>
+        <p:txBody>
+          <a:bodyPr wrap="square">
+            <a:spAutoFit/>
+          </a:bodyPr>
+          <a:lstStyle/>
+          <a:p>
+            <a:pPr algn="l">
+              <a:spcBef>
+                <a:spcPts val="0"/>
+              </a:spcBef>
+              <a:spcAft>
+                <a:spcPts val="0"/>
+              </a:spcAft>
+              <a:defRPr sz="800" b="1">
+                <a:solidFill>
+                  <a:srgbClr val="404A58"/>
+                </a:solidFill>
+                <a:latin typeface="Segoe UI"/>
+              </a:defRPr>
+            </a:pPr>
+            <a:r>
+              <a:t>app.log — application events &amp; HTTP</a:t>
+            </a:r>
+          </a:p>
+          <a:p>
+            <a:pPr algn="l">
+              <a:spcBef>
+                <a:spcPts val="0"/>
+              </a:spcBef>
+              <a:spcAft>
+                <a:spcPts val="0"/>
+              </a:spcAft>
+              <a:defRPr sz="800" b="1">
+                <a:solidFill>
+                  <a:srgbClr val="404A58"/>
+                </a:solidFill>
+                <a:latin typeface="Segoe UI"/>
+              </a:defRPr>
+            </a:pPr>
+            <a:r>
+              <a:t>agent_audit.log — LLM calls &amp; agent decisions</a:t>
+            </a:r>
+          </a:p>
+          <a:p>
+            <a:pPr algn="l">
+              <a:spcBef>
+                <a:spcPts val="0"/>
+              </a:spcBef>
+              <a:spcAft>
+                <a:spcPts val="0"/>
+              </a:spcAft>
+              <a:defRPr sz="800" b="1">
+                <a:solidFill>
+                  <a:srgbClr val="404A58"/>
+                </a:solidFill>
+                <a:latin typeface="Segoe UI"/>
+              </a:defRPr>
+            </a:pPr>
+            <a:r>
+              <a:t>conversation_audit.log — full chat history</a:t>
+            </a:r>
+          </a:p>
+          <a:p>
+            <a:pPr algn="l">
+              <a:spcBef>
+                <a:spcPts val="0"/>
+              </a:spcBef>
+              <a:spcAft>
+                <a:spcPts val="0"/>
+              </a:spcAft>
+              <a:defRPr sz="800" b="1">
+                <a:solidFill>
+                  <a:srgbClr val="404A58"/>
+                </a:solidFill>
+                <a:latin typeface="Segoe UI"/>
+              </a:defRPr>
+            </a:pPr>
+            <a:r>
+              <a:t>platform_audit.log — Jira API calls (sanitized)</a:t>
+            </a:r>
+          </a:p>
+        </p:txBody>
+      </p:sp>
       <p:cxnSp>
         <p:nvCxnSpPr>
-          <p:cNvPr id="110" name="Connector 109"/>
+          <p:cNvPr id="74" name="Connector 73"/>
           <p:cNvCxnSpPr/>
           <p:nvPr/>
         </p:nvCxnSpPr>
         <p:spPr>
-          <a:xfrm flipH="1" flipV="1">
-            <a:off x="6035040" y="4846320"/>
-            <a:ext cx="91440" cy="274320"/>
+          <a:xfrm flipV="1">
+            <a:off x="8869680" y="4343400"/>
+            <a:ext cx="0" cy="320040"/>
           </a:xfrm>
           <a:prstGeom prst="line">
             <a:avLst/>
           </a:prstGeom>
-          <a:ln w="19050">
-            <a:solidFill>
-              <a:srgbClr val="B0B8C5"/>
-            </a:solidFill>
-            <a:prstDash val="sysDash"/>
-          </a:ln>
-        </p:spPr>
-        <p:style>
-          <a:lnRef idx="2">
-            <a:schemeClr val="accent1"/>
-          </a:lnRef>
-          <a:fillRef idx="0">
-            <a:schemeClr val="accent1"/>
-          </a:fillRef>
-          <a:effectRef idx="1">
-            <a:schemeClr val="accent1"/>
-          </a:effectRef>
-          <a:fontRef idx="minor">
-            <a:schemeClr val="tx1"/>
-          </a:fontRef>
-        </p:style>
-      </p:cxnSp>
-      <p:cxnSp>
-        <p:nvCxnSpPr>
-          <p:cNvPr id="111" name="Connector 110"/>
-          <p:cNvCxnSpPr/>
-          <p:nvPr/>
-        </p:nvCxnSpPr>
-        <p:spPr>
-          <a:xfrm flipH="1" flipV="1">
-            <a:off x="9326880" y="4846320"/>
-            <a:ext cx="91440" cy="274320"/>
-          </a:xfrm>
-          <a:prstGeom prst="line">
-            <a:avLst/>
-          </a:prstGeom>
-          <a:ln w="19050">
+          <a:ln w="25400">
             <a:solidFill>
               <a:srgbClr val="4CAF50"/>
             </a:solidFill>
